--- a/docs/test/stress/m2-challenger-output/a24_long_tenants.pptx
+++ b/docs/test/stress/m2-challenger-output/a24_long_tenants.pptx
@@ -1016,14 +1016,39 @@
       </p:sp>
       <p:sp>
         <p:nvSpPr>
-          <p:cNvPr id="6" name="Text 4"/>
+          <p:cNvPr id="6" name="Shape 4"/>
           <p:cNvSpPr/>
           <p:nvPr/>
         </p:nvSpPr>
         <p:spPr>
           <a:xfrm>
-            <a:off x="566928" y="5961888"/>
-            <a:ext cx="3108960" cy="182880"/>
+            <a:off x="566928" y="1645920"/>
+            <a:ext cx="2011680" cy="329184"/>
+          </a:xfrm>
+          <a:prstGeom prst="rect">
+            <a:avLst/>
+          </a:prstGeom>
+          <a:solidFill>
+            <a:srgbClr val="10161F"/>
+          </a:solidFill>
+          <a:ln w="6350">
+            <a:solidFill>
+              <a:srgbClr val="10161F"/>
+            </a:solidFill>
+            <a:prstDash val="solid"/>
+          </a:ln>
+        </p:spPr>
+      </p:sp>
+      <p:sp>
+        <p:nvSpPr>
+          <p:cNvPr id="7" name="Text 5"/>
+          <p:cNvSpPr/>
+          <p:nvPr/>
+        </p:nvSpPr>
+        <p:spPr>
+          <a:xfrm>
+            <a:off x="566928" y="1645920"/>
+            <a:ext cx="2011680" cy="329184"/>
           </a:xfrm>
           <a:prstGeom prst="rect">
             <a:avLst/>
@@ -1032,24 +1057,1124 @@
           <a:ln/>
         </p:spPr>
         <p:txBody>
-          <a:bodyPr wrap="square" lIns="0" tIns="0" rIns="0" bIns="0" rtlCol="0" anchor="ctr"/>
+          <a:bodyPr wrap="none" lIns="0" tIns="0" rIns="0" bIns="0" rtlCol="0" anchor="ctr"/>
+          <a:lstStyle/>
+          <a:p>
+            <a:pPr algn="ctr" indent="0" marL="0">
+              <a:buNone/>
+            </a:pPr>
+            <a:r>
+              <a:rPr lang="en-US" sz="900" b="1" dirty="0">
+                <a:solidFill>
+                  <a:srgbClr val="FFFFFF"/>
+                </a:solidFill>
+                <a:latin typeface="맑은 고딕" pitchFamily="34" charset="0"/>
+                <a:ea typeface="맑은 고딕" pitchFamily="34" charset="-122"/>
+                <a:cs typeface="맑은 고딕" pitchFamily="34" charset="-120"/>
+              </a:rPr>
+              <a:t>층별 스태킹 플랜 (㎡)</a:t>
+            </a:r>
+            <a:endParaRPr lang="en-US" sz="900" dirty="0"/>
+          </a:p>
+        </p:txBody>
+      </p:sp>
+      <p:sp>
+        <p:nvSpPr>
+          <p:cNvPr id="8" name="Text 6"/>
+          <p:cNvSpPr/>
+          <p:nvPr/>
+        </p:nvSpPr>
+        <p:spPr>
+          <a:xfrm>
+            <a:off x="566928" y="5266944"/>
+            <a:ext cx="475488" cy="329184"/>
+          </a:xfrm>
+          <a:prstGeom prst="rect">
+            <a:avLst/>
+          </a:prstGeom>
+          <a:noFill/>
+          <a:ln/>
+        </p:spPr>
+        <p:txBody>
+          <a:bodyPr wrap="none" lIns="0" tIns="0" rIns="0" bIns="0" rtlCol="0" anchor="ctr"/>
+          <a:lstStyle/>
+          <a:p>
+            <a:pPr algn="r" indent="0" marL="0">
+              <a:buNone/>
+            </a:pPr>
+            <a:r>
+              <a:rPr lang="en-US" sz="900" b="1" dirty="0">
+                <a:solidFill>
+                  <a:srgbClr val="10161F"/>
+                </a:solidFill>
+                <a:latin typeface="맑은 고딕" pitchFamily="34" charset="0"/>
+                <a:ea typeface="맑은 고딕" pitchFamily="34" charset="-122"/>
+                <a:cs typeface="맑은 고딕" pitchFamily="34" charset="-120"/>
+              </a:rPr>
+              <a:t>B1</a:t>
+            </a:r>
+            <a:endParaRPr lang="en-US" sz="900" dirty="0"/>
+          </a:p>
+        </p:txBody>
+      </p:sp>
+      <p:sp>
+        <p:nvSpPr>
+          <p:cNvPr id="9" name="Shape 7"/>
+          <p:cNvSpPr/>
+          <p:nvPr/>
+        </p:nvSpPr>
+        <p:spPr>
+          <a:xfrm>
+            <a:off x="1115568" y="5298948"/>
+            <a:ext cx="1444752" cy="265176"/>
+          </a:xfrm>
+          <a:prstGeom prst="rect">
+            <a:avLst/>
+          </a:prstGeom>
+          <a:solidFill>
+            <a:srgbClr val="FBEFE8"/>
+          </a:solidFill>
+          <a:ln w="12700">
+            <a:solidFill>
+              <a:srgbClr val="B05A2E"/>
+            </a:solidFill>
+            <a:prstDash val="dash"/>
+          </a:ln>
+        </p:spPr>
+      </p:sp>
+      <p:sp>
+        <p:nvSpPr>
+          <p:cNvPr id="10" name="Text 8"/>
+          <p:cNvSpPr/>
+          <p:nvPr/>
+        </p:nvSpPr>
+        <p:spPr>
+          <a:xfrm>
+            <a:off x="1143000" y="5298948"/>
+            <a:ext cx="1389888" cy="265176"/>
+          </a:xfrm>
+          <a:prstGeom prst="rect">
+            <a:avLst/>
+          </a:prstGeom>
+          <a:noFill/>
+          <a:ln/>
+        </p:spPr>
+        <p:txBody>
+          <a:bodyPr wrap="none" lIns="0" tIns="0" rIns="0" bIns="0" rtlCol="0" anchor="ctr"/>
+          <a:lstStyle/>
+          <a:p>
+            <a:pPr algn="ctr" indent="0" marL="0">
+              <a:buNone/>
+            </a:pPr>
+            <a:r>
+              <a:rPr lang="en-US" sz="800" b="1" dirty="0">
+                <a:solidFill>
+                  <a:srgbClr val="B05A2E"/>
+                </a:solidFill>
+                <a:latin typeface="맑은 고딕" pitchFamily="34" charset="0"/>
+                <a:ea typeface="맑은 고딕" pitchFamily="34" charset="-122"/>
+                <a:cs typeface="맑은 고딕" pitchFamily="34" charset="-120"/>
+              </a:rPr>
+              <a:t>공실 200.0㎡</a:t>
+            </a:r>
+            <a:endParaRPr lang="en-US" sz="800" dirty="0"/>
+          </a:p>
+        </p:txBody>
+      </p:sp>
+      <p:sp>
+        <p:nvSpPr>
+          <p:cNvPr id="11" name="Text 9"/>
+          <p:cNvSpPr/>
+          <p:nvPr/>
+        </p:nvSpPr>
+        <p:spPr>
+          <a:xfrm>
+            <a:off x="566928" y="4937760"/>
+            <a:ext cx="475488" cy="329184"/>
+          </a:xfrm>
+          <a:prstGeom prst="rect">
+            <a:avLst/>
+          </a:prstGeom>
+          <a:noFill/>
+          <a:ln/>
+        </p:spPr>
+        <p:txBody>
+          <a:bodyPr wrap="none" lIns="0" tIns="0" rIns="0" bIns="0" rtlCol="0" anchor="ctr"/>
+          <a:lstStyle/>
+          <a:p>
+            <a:pPr algn="r" indent="0" marL="0">
+              <a:buNone/>
+            </a:pPr>
+            <a:r>
+              <a:rPr lang="en-US" sz="900" b="1" dirty="0">
+                <a:solidFill>
+                  <a:srgbClr val="10161F"/>
+                </a:solidFill>
+                <a:latin typeface="맑은 고딕" pitchFamily="34" charset="0"/>
+                <a:ea typeface="맑은 고딕" pitchFamily="34" charset="-122"/>
+                <a:cs typeface="맑은 고딕" pitchFamily="34" charset="-120"/>
+              </a:rPr>
+              <a:t>1F</a:t>
+            </a:r>
+            <a:endParaRPr lang="en-US" sz="900" dirty="0"/>
+          </a:p>
+        </p:txBody>
+      </p:sp>
+      <p:sp>
+        <p:nvSpPr>
+          <p:cNvPr id="12" name="Shape 10"/>
+          <p:cNvSpPr/>
+          <p:nvPr/>
+        </p:nvSpPr>
+        <p:spPr>
+          <a:xfrm>
+            <a:off x="1115568" y="4969764"/>
+            <a:ext cx="1444752" cy="265176"/>
+          </a:xfrm>
+          <a:prstGeom prst="rect">
+            <a:avLst/>
+          </a:prstGeom>
+          <a:solidFill>
+            <a:srgbClr val="B8D8D8"/>
+          </a:solidFill>
+          <a:ln w="9525">
+            <a:solidFill>
+              <a:srgbClr val="5B6B73"/>
+            </a:solidFill>
+            <a:prstDash val="solid"/>
+          </a:ln>
+        </p:spPr>
+      </p:sp>
+      <p:sp>
+        <p:nvSpPr>
+          <p:cNvPr id="13" name="Text 11"/>
+          <p:cNvSpPr/>
+          <p:nvPr/>
+        </p:nvSpPr>
+        <p:spPr>
+          <a:xfrm>
+            <a:off x="566928" y="4608576"/>
+            <a:ext cx="475488" cy="329184"/>
+          </a:xfrm>
+          <a:prstGeom prst="rect">
+            <a:avLst/>
+          </a:prstGeom>
+          <a:noFill/>
+          <a:ln/>
+        </p:spPr>
+        <p:txBody>
+          <a:bodyPr wrap="none" lIns="0" tIns="0" rIns="0" bIns="0" rtlCol="0" anchor="ctr"/>
+          <a:lstStyle/>
+          <a:p>
+            <a:pPr algn="r" indent="0" marL="0">
+              <a:buNone/>
+            </a:pPr>
+            <a:r>
+              <a:rPr lang="en-US" sz="900" b="1" dirty="0">
+                <a:solidFill>
+                  <a:srgbClr val="10161F"/>
+                </a:solidFill>
+                <a:latin typeface="맑은 고딕" pitchFamily="34" charset="0"/>
+                <a:ea typeface="맑은 고딕" pitchFamily="34" charset="-122"/>
+                <a:cs typeface="맑은 고딕" pitchFamily="34" charset="-120"/>
+              </a:rPr>
+              <a:t>2F</a:t>
+            </a:r>
+            <a:endParaRPr lang="en-US" sz="900" dirty="0"/>
+          </a:p>
+        </p:txBody>
+      </p:sp>
+      <p:sp>
+        <p:nvSpPr>
+          <p:cNvPr id="14" name="Shape 12"/>
+          <p:cNvSpPr/>
+          <p:nvPr/>
+        </p:nvSpPr>
+        <p:spPr>
+          <a:xfrm>
+            <a:off x="1115568" y="4640580"/>
+            <a:ext cx="1444752" cy="265176"/>
+          </a:xfrm>
+          <a:prstGeom prst="rect">
+            <a:avLst/>
+          </a:prstGeom>
+          <a:solidFill>
+            <a:srgbClr val="93B3A0"/>
+          </a:solidFill>
+          <a:ln w="9525">
+            <a:solidFill>
+              <a:srgbClr val="5B6B73"/>
+            </a:solidFill>
+            <a:prstDash val="solid"/>
+          </a:ln>
+        </p:spPr>
+      </p:sp>
+      <p:sp>
+        <p:nvSpPr>
+          <p:cNvPr id="15" name="Text 13"/>
+          <p:cNvSpPr/>
+          <p:nvPr/>
+        </p:nvSpPr>
+        <p:spPr>
+          <a:xfrm>
+            <a:off x="566928" y="4279392"/>
+            <a:ext cx="475488" cy="329184"/>
+          </a:xfrm>
+          <a:prstGeom prst="rect">
+            <a:avLst/>
+          </a:prstGeom>
+          <a:noFill/>
+          <a:ln/>
+        </p:spPr>
+        <p:txBody>
+          <a:bodyPr wrap="none" lIns="0" tIns="0" rIns="0" bIns="0" rtlCol="0" anchor="ctr"/>
+          <a:lstStyle/>
+          <a:p>
+            <a:pPr algn="r" indent="0" marL="0">
+              <a:buNone/>
+            </a:pPr>
+            <a:r>
+              <a:rPr lang="en-US" sz="900" b="1" dirty="0">
+                <a:solidFill>
+                  <a:srgbClr val="10161F"/>
+                </a:solidFill>
+                <a:latin typeface="맑은 고딕" pitchFamily="34" charset="0"/>
+                <a:ea typeface="맑은 고딕" pitchFamily="34" charset="-122"/>
+                <a:cs typeface="맑은 고딕" pitchFamily="34" charset="-120"/>
+              </a:rPr>
+              <a:t>3F</a:t>
+            </a:r>
+            <a:endParaRPr lang="en-US" sz="900" dirty="0"/>
+          </a:p>
+        </p:txBody>
+      </p:sp>
+      <p:sp>
+        <p:nvSpPr>
+          <p:cNvPr id="16" name="Shape 14"/>
+          <p:cNvSpPr/>
+          <p:nvPr/>
+        </p:nvSpPr>
+        <p:spPr>
+          <a:xfrm>
+            <a:off x="1115568" y="4311396"/>
+            <a:ext cx="1444752" cy="265176"/>
+          </a:xfrm>
+          <a:prstGeom prst="rect">
+            <a:avLst/>
+          </a:prstGeom>
+          <a:solidFill>
+            <a:srgbClr val="A6C1D9"/>
+          </a:solidFill>
+          <a:ln w="9525">
+            <a:solidFill>
+              <a:srgbClr val="5B6B73"/>
+            </a:solidFill>
+            <a:prstDash val="solid"/>
+          </a:ln>
+        </p:spPr>
+      </p:sp>
+      <p:sp>
+        <p:nvSpPr>
+          <p:cNvPr id="17" name="Text 15"/>
+          <p:cNvSpPr/>
+          <p:nvPr/>
+        </p:nvSpPr>
+        <p:spPr>
+          <a:xfrm>
+            <a:off x="566928" y="3950208"/>
+            <a:ext cx="475488" cy="329184"/>
+          </a:xfrm>
+          <a:prstGeom prst="rect">
+            <a:avLst/>
+          </a:prstGeom>
+          <a:noFill/>
+          <a:ln/>
+        </p:spPr>
+        <p:txBody>
+          <a:bodyPr wrap="none" lIns="0" tIns="0" rIns="0" bIns="0" rtlCol="0" anchor="ctr"/>
+          <a:lstStyle/>
+          <a:p>
+            <a:pPr algn="r" indent="0" marL="0">
+              <a:buNone/>
+            </a:pPr>
+            <a:r>
+              <a:rPr lang="en-US" sz="900" b="1" dirty="0">
+                <a:solidFill>
+                  <a:srgbClr val="10161F"/>
+                </a:solidFill>
+                <a:latin typeface="맑은 고딕" pitchFamily="34" charset="0"/>
+                <a:ea typeface="맑은 고딕" pitchFamily="34" charset="-122"/>
+                <a:cs typeface="맑은 고딕" pitchFamily="34" charset="-120"/>
+              </a:rPr>
+              <a:t>4F</a:t>
+            </a:r>
+            <a:endParaRPr lang="en-US" sz="900" dirty="0"/>
+          </a:p>
+        </p:txBody>
+      </p:sp>
+      <p:sp>
+        <p:nvSpPr>
+          <p:cNvPr id="18" name="Shape 16"/>
+          <p:cNvSpPr/>
+          <p:nvPr/>
+        </p:nvSpPr>
+        <p:spPr>
+          <a:xfrm>
+            <a:off x="1115568" y="3982212"/>
+            <a:ext cx="1444752" cy="265176"/>
+          </a:xfrm>
+          <a:prstGeom prst="rect">
+            <a:avLst/>
+          </a:prstGeom>
+          <a:solidFill>
+            <a:srgbClr val="C5B4E3"/>
+          </a:solidFill>
+          <a:ln w="9525">
+            <a:solidFill>
+              <a:srgbClr val="5B6B73"/>
+            </a:solidFill>
+            <a:prstDash val="solid"/>
+          </a:ln>
+        </p:spPr>
+      </p:sp>
+      <p:sp>
+        <p:nvSpPr>
+          <p:cNvPr id="19" name="Text 17"/>
+          <p:cNvSpPr/>
+          <p:nvPr/>
+        </p:nvSpPr>
+        <p:spPr>
+          <a:xfrm>
+            <a:off x="566928" y="3621024"/>
+            <a:ext cx="475488" cy="329184"/>
+          </a:xfrm>
+          <a:prstGeom prst="rect">
+            <a:avLst/>
+          </a:prstGeom>
+          <a:noFill/>
+          <a:ln/>
+        </p:spPr>
+        <p:txBody>
+          <a:bodyPr wrap="none" lIns="0" tIns="0" rIns="0" bIns="0" rtlCol="0" anchor="ctr"/>
+          <a:lstStyle/>
+          <a:p>
+            <a:pPr algn="r" indent="0" marL="0">
+              <a:buNone/>
+            </a:pPr>
+            <a:r>
+              <a:rPr lang="en-US" sz="900" b="1" dirty="0">
+                <a:solidFill>
+                  <a:srgbClr val="10161F"/>
+                </a:solidFill>
+                <a:latin typeface="맑은 고딕" pitchFamily="34" charset="0"/>
+                <a:ea typeface="맑은 고딕" pitchFamily="34" charset="-122"/>
+                <a:cs typeface="맑은 고딕" pitchFamily="34" charset="-120"/>
+              </a:rPr>
+              <a:t>5F</a:t>
+            </a:r>
+            <a:endParaRPr lang="en-US" sz="900" dirty="0"/>
+          </a:p>
+        </p:txBody>
+      </p:sp>
+      <p:sp>
+        <p:nvSpPr>
+          <p:cNvPr id="20" name="Shape 18"/>
+          <p:cNvSpPr/>
+          <p:nvPr/>
+        </p:nvSpPr>
+        <p:spPr>
+          <a:xfrm>
+            <a:off x="1115568" y="3653028"/>
+            <a:ext cx="1444752" cy="265176"/>
+          </a:xfrm>
+          <a:prstGeom prst="rect">
+            <a:avLst/>
+          </a:prstGeom>
+          <a:solidFill>
+            <a:srgbClr val="A6C1D9"/>
+          </a:solidFill>
+          <a:ln w="9525">
+            <a:solidFill>
+              <a:srgbClr val="5B6B73"/>
+            </a:solidFill>
+            <a:prstDash val="solid"/>
+          </a:ln>
+        </p:spPr>
+      </p:sp>
+      <p:sp>
+        <p:nvSpPr>
+          <p:cNvPr id="21" name="Text 19"/>
+          <p:cNvSpPr/>
+          <p:nvPr/>
+        </p:nvSpPr>
+        <p:spPr>
+          <a:xfrm>
+            <a:off x="566928" y="3291840"/>
+            <a:ext cx="475488" cy="329184"/>
+          </a:xfrm>
+          <a:prstGeom prst="rect">
+            <a:avLst/>
+          </a:prstGeom>
+          <a:noFill/>
+          <a:ln/>
+        </p:spPr>
+        <p:txBody>
+          <a:bodyPr wrap="none" lIns="0" tIns="0" rIns="0" bIns="0" rtlCol="0" anchor="ctr"/>
+          <a:lstStyle/>
+          <a:p>
+            <a:pPr algn="r" indent="0" marL="0">
+              <a:buNone/>
+            </a:pPr>
+            <a:r>
+              <a:rPr lang="en-US" sz="900" b="1" dirty="0">
+                <a:solidFill>
+                  <a:srgbClr val="10161F"/>
+                </a:solidFill>
+                <a:latin typeface="맑은 고딕" pitchFamily="34" charset="0"/>
+                <a:ea typeface="맑은 고딕" pitchFamily="34" charset="-122"/>
+                <a:cs typeface="맑은 고딕" pitchFamily="34" charset="-120"/>
+              </a:rPr>
+              <a:t>6F</a:t>
+            </a:r>
+            <a:endParaRPr lang="en-US" sz="900" dirty="0"/>
+          </a:p>
+        </p:txBody>
+      </p:sp>
+      <p:sp>
+        <p:nvSpPr>
+          <p:cNvPr id="22" name="Shape 20"/>
+          <p:cNvSpPr/>
+          <p:nvPr/>
+        </p:nvSpPr>
+        <p:spPr>
+          <a:xfrm>
+            <a:off x="1115568" y="3323844"/>
+            <a:ext cx="1444752" cy="265176"/>
+          </a:xfrm>
+          <a:prstGeom prst="rect">
+            <a:avLst/>
+          </a:prstGeom>
+          <a:solidFill>
+            <a:srgbClr val="C5B4E3"/>
+          </a:solidFill>
+          <a:ln w="9525">
+            <a:solidFill>
+              <a:srgbClr val="5B6B73"/>
+            </a:solidFill>
+            <a:prstDash val="solid"/>
+          </a:ln>
+        </p:spPr>
+      </p:sp>
+      <p:sp>
+        <p:nvSpPr>
+          <p:cNvPr id="23" name="Text 21"/>
+          <p:cNvSpPr/>
+          <p:nvPr/>
+        </p:nvSpPr>
+        <p:spPr>
+          <a:xfrm>
+            <a:off x="566928" y="2962656"/>
+            <a:ext cx="475488" cy="329184"/>
+          </a:xfrm>
+          <a:prstGeom prst="rect">
+            <a:avLst/>
+          </a:prstGeom>
+          <a:noFill/>
+          <a:ln/>
+        </p:spPr>
+        <p:txBody>
+          <a:bodyPr wrap="none" lIns="0" tIns="0" rIns="0" bIns="0" rtlCol="0" anchor="ctr"/>
+          <a:lstStyle/>
+          <a:p>
+            <a:pPr algn="r" indent="0" marL="0">
+              <a:buNone/>
+            </a:pPr>
+            <a:r>
+              <a:rPr lang="en-US" sz="900" b="1" dirty="0">
+                <a:solidFill>
+                  <a:srgbClr val="10161F"/>
+                </a:solidFill>
+                <a:latin typeface="맑은 고딕" pitchFamily="34" charset="0"/>
+                <a:ea typeface="맑은 고딕" pitchFamily="34" charset="-122"/>
+                <a:cs typeface="맑은 고딕" pitchFamily="34" charset="-120"/>
+              </a:rPr>
+              <a:t>7F</a:t>
+            </a:r>
+            <a:endParaRPr lang="en-US" sz="900" dirty="0"/>
+          </a:p>
+        </p:txBody>
+      </p:sp>
+      <p:sp>
+        <p:nvSpPr>
+          <p:cNvPr id="24" name="Shape 22"/>
+          <p:cNvSpPr/>
+          <p:nvPr/>
+        </p:nvSpPr>
+        <p:spPr>
+          <a:xfrm>
+            <a:off x="1115568" y="2994660"/>
+            <a:ext cx="1444752" cy="265176"/>
+          </a:xfrm>
+          <a:prstGeom prst="rect">
+            <a:avLst/>
+          </a:prstGeom>
+          <a:solidFill>
+            <a:srgbClr val="93B3A0"/>
+          </a:solidFill>
+          <a:ln w="9525">
+            <a:solidFill>
+              <a:srgbClr val="5B6B73"/>
+            </a:solidFill>
+            <a:prstDash val="solid"/>
+          </a:ln>
+        </p:spPr>
+      </p:sp>
+      <p:sp>
+        <p:nvSpPr>
+          <p:cNvPr id="25" name="Text 23"/>
+          <p:cNvSpPr/>
+          <p:nvPr/>
+        </p:nvSpPr>
+        <p:spPr>
+          <a:xfrm>
+            <a:off x="566928" y="2633472"/>
+            <a:ext cx="475488" cy="329184"/>
+          </a:xfrm>
+          <a:prstGeom prst="rect">
+            <a:avLst/>
+          </a:prstGeom>
+          <a:noFill/>
+          <a:ln/>
+        </p:spPr>
+        <p:txBody>
+          <a:bodyPr wrap="none" lIns="0" tIns="0" rIns="0" bIns="0" rtlCol="0" anchor="ctr"/>
+          <a:lstStyle/>
+          <a:p>
+            <a:pPr algn="r" indent="0" marL="0">
+              <a:buNone/>
+            </a:pPr>
+            <a:r>
+              <a:rPr lang="en-US" sz="900" b="1" dirty="0">
+                <a:solidFill>
+                  <a:srgbClr val="10161F"/>
+                </a:solidFill>
+                <a:latin typeface="맑은 고딕" pitchFamily="34" charset="0"/>
+                <a:ea typeface="맑은 고딕" pitchFamily="34" charset="-122"/>
+                <a:cs typeface="맑은 고딕" pitchFamily="34" charset="-120"/>
+              </a:rPr>
+              <a:t>8F</a:t>
+            </a:r>
+            <a:endParaRPr lang="en-US" sz="900" dirty="0"/>
+          </a:p>
+        </p:txBody>
+      </p:sp>
+      <p:sp>
+        <p:nvSpPr>
+          <p:cNvPr id="26" name="Shape 24"/>
+          <p:cNvSpPr/>
+          <p:nvPr/>
+        </p:nvSpPr>
+        <p:spPr>
+          <a:xfrm>
+            <a:off x="1115568" y="2665476"/>
+            <a:ext cx="1444752" cy="265176"/>
+          </a:xfrm>
+          <a:prstGeom prst="rect">
+            <a:avLst/>
+          </a:prstGeom>
+          <a:solidFill>
+            <a:srgbClr val="F2C4A2"/>
+          </a:solidFill>
+          <a:ln w="9525">
+            <a:solidFill>
+              <a:srgbClr val="5B6B73"/>
+            </a:solidFill>
+            <a:prstDash val="solid"/>
+          </a:ln>
+        </p:spPr>
+      </p:sp>
+      <p:sp>
+        <p:nvSpPr>
+          <p:cNvPr id="27" name="Text 25"/>
+          <p:cNvSpPr/>
+          <p:nvPr/>
+        </p:nvSpPr>
+        <p:spPr>
+          <a:xfrm>
+            <a:off x="566928" y="2304288"/>
+            <a:ext cx="475488" cy="329184"/>
+          </a:xfrm>
+          <a:prstGeom prst="rect">
+            <a:avLst/>
+          </a:prstGeom>
+          <a:noFill/>
+          <a:ln/>
+        </p:spPr>
+        <p:txBody>
+          <a:bodyPr wrap="none" lIns="0" tIns="0" rIns="0" bIns="0" rtlCol="0" anchor="ctr"/>
+          <a:lstStyle/>
+          <a:p>
+            <a:pPr algn="r" indent="0" marL="0">
+              <a:buNone/>
+            </a:pPr>
+            <a:r>
+              <a:rPr lang="en-US" sz="900" b="1" dirty="0">
+                <a:solidFill>
+                  <a:srgbClr val="10161F"/>
+                </a:solidFill>
+                <a:latin typeface="맑은 고딕" pitchFamily="34" charset="0"/>
+                <a:ea typeface="맑은 고딕" pitchFamily="34" charset="-122"/>
+                <a:cs typeface="맑은 고딕" pitchFamily="34" charset="-120"/>
+              </a:rPr>
+              <a:t>9F</a:t>
+            </a:r>
+            <a:endParaRPr lang="en-US" sz="900" dirty="0"/>
+          </a:p>
+        </p:txBody>
+      </p:sp>
+      <p:sp>
+        <p:nvSpPr>
+          <p:cNvPr id="28" name="Shape 26"/>
+          <p:cNvSpPr/>
+          <p:nvPr/>
+        </p:nvSpPr>
+        <p:spPr>
+          <a:xfrm>
+            <a:off x="1115568" y="2336292"/>
+            <a:ext cx="1444752" cy="265176"/>
+          </a:xfrm>
+          <a:prstGeom prst="rect">
+            <a:avLst/>
+          </a:prstGeom>
+          <a:solidFill>
+            <a:srgbClr val="A6C1D9"/>
+          </a:solidFill>
+          <a:ln w="9525">
+            <a:solidFill>
+              <a:srgbClr val="5B6B73"/>
+            </a:solidFill>
+            <a:prstDash val="solid"/>
+          </a:ln>
+        </p:spPr>
+      </p:sp>
+      <p:sp>
+        <p:nvSpPr>
+          <p:cNvPr id="29" name="Text 27"/>
+          <p:cNvSpPr/>
+          <p:nvPr/>
+        </p:nvSpPr>
+        <p:spPr>
+          <a:xfrm>
+            <a:off x="566928" y="1975104"/>
+            <a:ext cx="475488" cy="329184"/>
+          </a:xfrm>
+          <a:prstGeom prst="rect">
+            <a:avLst/>
+          </a:prstGeom>
+          <a:noFill/>
+          <a:ln/>
+        </p:spPr>
+        <p:txBody>
+          <a:bodyPr wrap="none" lIns="0" tIns="0" rIns="0" bIns="0" rtlCol="0" anchor="ctr"/>
+          <a:lstStyle/>
+          <a:p>
+            <a:pPr algn="r" indent="0" marL="0">
+              <a:buNone/>
+            </a:pPr>
+            <a:r>
+              <a:rPr lang="en-US" sz="900" b="1" dirty="0">
+                <a:solidFill>
+                  <a:srgbClr val="10161F"/>
+                </a:solidFill>
+                <a:latin typeface="맑은 고딕" pitchFamily="34" charset="0"/>
+                <a:ea typeface="맑은 고딕" pitchFamily="34" charset="-122"/>
+                <a:cs typeface="맑은 고딕" pitchFamily="34" charset="-120"/>
+              </a:rPr>
+              <a:t>10F</a:t>
+            </a:r>
+            <a:endParaRPr lang="en-US" sz="900" dirty="0"/>
+          </a:p>
+        </p:txBody>
+      </p:sp>
+      <p:sp>
+        <p:nvSpPr>
+          <p:cNvPr id="30" name="Shape 28"/>
+          <p:cNvSpPr/>
+          <p:nvPr/>
+        </p:nvSpPr>
+        <p:spPr>
+          <a:xfrm>
+            <a:off x="1115568" y="2007108"/>
+            <a:ext cx="1444752" cy="265176"/>
+          </a:xfrm>
+          <a:prstGeom prst="rect">
+            <a:avLst/>
+          </a:prstGeom>
+          <a:solidFill>
+            <a:srgbClr val="C5B4E3"/>
+          </a:solidFill>
+          <a:ln w="9525">
+            <a:solidFill>
+              <a:srgbClr val="5B6B73"/>
+            </a:solidFill>
+            <a:prstDash val="solid"/>
+          </a:ln>
+        </p:spPr>
+      </p:sp>
+      <p:sp>
+        <p:nvSpPr>
+          <p:cNvPr id="31" name="Shape 29"/>
+          <p:cNvSpPr/>
+          <p:nvPr/>
+        </p:nvSpPr>
+        <p:spPr>
+          <a:xfrm>
+            <a:off x="1078992" y="5266944"/>
+            <a:ext cx="1499616" cy="0"/>
+          </a:xfrm>
+          <a:prstGeom prst="line">
+            <a:avLst/>
+          </a:prstGeom>
+          <a:noFill/>
+          <a:ln w="15875">
+            <a:solidFill>
+              <a:srgbClr val="94A3B8"/>
+            </a:solidFill>
+            <a:prstDash val="dash"/>
+          </a:ln>
+        </p:spPr>
+      </p:sp>
+      <p:sp>
+        <p:nvSpPr>
+          <p:cNvPr id="32" name="Text 30"/>
+          <p:cNvSpPr/>
+          <p:nvPr/>
+        </p:nvSpPr>
+        <p:spPr>
+          <a:xfrm>
+            <a:off x="566928" y="5193792"/>
+            <a:ext cx="219456" cy="146304"/>
+          </a:xfrm>
+          <a:prstGeom prst="rect">
+            <a:avLst/>
+          </a:prstGeom>
+          <a:noFill/>
+          <a:ln/>
+        </p:spPr>
+        <p:txBody>
+          <a:bodyPr wrap="none" lIns="0" tIns="0" rIns="0" bIns="0" rtlCol="0" anchor="ctr"/>
           <a:lstStyle/>
           <a:p>
             <a:pPr algn="l" indent="0" marL="0">
               <a:buNone/>
             </a:pPr>
             <a:r>
-              <a:rPr lang="en-US" sz="850" dirty="0">
+              <a:rPr lang="en-US" sz="650" b="1" dirty="0">
                 <a:solidFill>
-                  <a:srgbClr val="8A8A8A"/>
+                  <a:srgbClr val="64748B"/>
                 </a:solidFill>
                 <a:latin typeface="맑은 고딕" pitchFamily="34" charset="0"/>
                 <a:ea typeface="맑은 고딕" pitchFamily="34" charset="-122"/>
                 <a:cs typeface="맑은 고딕" pitchFamily="34" charset="-120"/>
               </a:rPr>
-              <a:t>※ 렌트롤 현황 기준 층별 공간 배치도</a:t>
+              <a:t>GL</a:t>
             </a:r>
-            <a:endParaRPr lang="en-US" sz="850" dirty="0"/>
+            <a:endParaRPr lang="en-US" sz="650" dirty="0"/>
+          </a:p>
+        </p:txBody>
+      </p:sp>
+      <p:sp>
+        <p:nvSpPr>
+          <p:cNvPr id="33" name="Shape 31"/>
+          <p:cNvSpPr/>
+          <p:nvPr/>
+        </p:nvSpPr>
+        <p:spPr>
+          <a:xfrm>
+            <a:off x="603504" y="5705856"/>
+            <a:ext cx="118872" cy="109728"/>
+          </a:xfrm>
+          <a:prstGeom prst="rect">
+            <a:avLst/>
+          </a:prstGeom>
+          <a:solidFill>
+            <a:srgbClr val="FBEFE8"/>
+          </a:solidFill>
+          <a:ln w="9525">
+            <a:solidFill>
+              <a:srgbClr val="B05A2E"/>
+            </a:solidFill>
+            <a:prstDash val="dash"/>
+          </a:ln>
+        </p:spPr>
+      </p:sp>
+      <p:sp>
+        <p:nvSpPr>
+          <p:cNvPr id="34" name="Text 32"/>
+          <p:cNvSpPr/>
+          <p:nvPr/>
+        </p:nvSpPr>
+        <p:spPr>
+          <a:xfrm>
+            <a:off x="758952" y="5596128"/>
+            <a:ext cx="243332" cy="329184"/>
+          </a:xfrm>
+          <a:prstGeom prst="rect">
+            <a:avLst/>
+          </a:prstGeom>
+          <a:noFill/>
+          <a:ln/>
+        </p:spPr>
+        <p:txBody>
+          <a:bodyPr wrap="none" lIns="0" tIns="0" rIns="0" bIns="0" rtlCol="0" anchor="ctr"/>
+          <a:lstStyle/>
+          <a:p>
+            <a:pPr indent="0" marL="0">
+              <a:buNone/>
+            </a:pPr>
+            <a:r>
+              <a:rPr lang="en-US" sz="700" b="1" dirty="0">
+                <a:solidFill>
+                  <a:srgbClr val="B05A2E"/>
+                </a:solidFill>
+                <a:latin typeface="맑은 고딕" pitchFamily="34" charset="0"/>
+                <a:ea typeface="맑은 고딕" pitchFamily="34" charset="-122"/>
+                <a:cs typeface="맑은 고딕" pitchFamily="34" charset="-120"/>
+              </a:rPr>
+              <a:t>공실</a:t>
+            </a:r>
+            <a:endParaRPr lang="en-US" sz="700" dirty="0"/>
+          </a:p>
+        </p:txBody>
+      </p:sp>
+      <p:sp>
+        <p:nvSpPr>
+          <p:cNvPr id="35" name="Text 33"/>
+          <p:cNvSpPr/>
+          <p:nvPr/>
+        </p:nvSpPr>
+        <p:spPr>
+          <a:xfrm>
+            <a:off x="1038860" y="5596128"/>
+            <a:ext cx="232664" cy="329184"/>
+          </a:xfrm>
+          <a:prstGeom prst="rect">
+            <a:avLst/>
+          </a:prstGeom>
+          <a:noFill/>
+          <a:ln/>
+        </p:spPr>
+        <p:txBody>
+          <a:bodyPr wrap="none" lIns="0" tIns="0" rIns="0" bIns="0" rtlCol="0" anchor="ctr"/>
+          <a:lstStyle/>
+          <a:p>
+            <a:pPr indent="0" marL="0">
+              <a:buNone/>
+            </a:pPr>
+            <a:r>
+              <a:rPr lang="en-US" sz="700" dirty="0">
+                <a:solidFill>
+                  <a:srgbClr val="5B6B73"/>
+                </a:solidFill>
+                <a:latin typeface="맑은 고딕" pitchFamily="34" charset="0"/>
+                <a:ea typeface="맑은 고딕" pitchFamily="34" charset="-122"/>
+                <a:cs typeface="맑은 고딕" pitchFamily="34" charset="-120"/>
+              </a:rPr>
+              <a:t>만기</a:t>
+            </a:r>
+            <a:endParaRPr lang="en-US" sz="700" dirty="0"/>
+          </a:p>
+        </p:txBody>
+      </p:sp>
+      <p:sp>
+        <p:nvSpPr>
+          <p:cNvPr id="36" name="Shape 34"/>
+          <p:cNvSpPr/>
+          <p:nvPr/>
+        </p:nvSpPr>
+        <p:spPr>
+          <a:xfrm>
+            <a:off x="1308100" y="5705856"/>
+            <a:ext cx="118872" cy="109728"/>
+          </a:xfrm>
+          <a:prstGeom prst="rect">
+            <a:avLst/>
+          </a:prstGeom>
+          <a:solidFill>
+            <a:srgbClr val="93B3A0"/>
+          </a:solidFill>
+          <a:ln w="6350">
+            <a:solidFill>
+              <a:srgbClr val="5B6B73"/>
+            </a:solidFill>
+            <a:prstDash val="solid"/>
+          </a:ln>
+        </p:spPr>
+      </p:sp>
+      <p:sp>
+        <p:nvSpPr>
+          <p:cNvPr id="37" name="Text 35"/>
+          <p:cNvSpPr/>
+          <p:nvPr/>
+        </p:nvSpPr>
+        <p:spPr>
+          <a:xfrm>
+            <a:off x="1463548" y="5596128"/>
+            <a:ext cx="183769" cy="329184"/>
+          </a:xfrm>
+          <a:prstGeom prst="rect">
+            <a:avLst/>
+          </a:prstGeom>
+          <a:noFill/>
+          <a:ln/>
+        </p:spPr>
+        <p:txBody>
+          <a:bodyPr wrap="none" lIns="0" tIns="0" rIns="0" bIns="0" rtlCol="0" anchor="ctr"/>
+          <a:lstStyle/>
+          <a:p>
+            <a:pPr indent="0" marL="0">
+              <a:buNone/>
+            </a:pPr>
+            <a:r>
+              <a:rPr lang="en-US" sz="700" dirty="0">
+                <a:solidFill>
+                  <a:srgbClr val="5B6B73"/>
+                </a:solidFill>
+                <a:latin typeface="맑은 고딕" pitchFamily="34" charset="0"/>
+                <a:ea typeface="맑은 고딕" pitchFamily="34" charset="-122"/>
+                <a:cs typeface="맑은 고딕" pitchFamily="34" charset="-120"/>
+              </a:rPr>
+              <a:t>'26</a:t>
+            </a:r>
+            <a:endParaRPr lang="en-US" sz="700" dirty="0"/>
+          </a:p>
+        </p:txBody>
+      </p:sp>
+      <p:sp>
+        <p:nvSpPr>
+          <p:cNvPr id="38" name="Shape 36"/>
+          <p:cNvSpPr/>
+          <p:nvPr/>
+        </p:nvSpPr>
+        <p:spPr>
+          <a:xfrm>
+            <a:off x="1683893" y="5705856"/>
+            <a:ext cx="118872" cy="109728"/>
+          </a:xfrm>
+          <a:prstGeom prst="rect">
+            <a:avLst/>
+          </a:prstGeom>
+          <a:solidFill>
+            <a:srgbClr val="A6C1D9"/>
+          </a:solidFill>
+          <a:ln w="6350">
+            <a:solidFill>
+              <a:srgbClr val="5B6B73"/>
+            </a:solidFill>
+            <a:prstDash val="solid"/>
+          </a:ln>
+        </p:spPr>
+      </p:sp>
+      <p:sp>
+        <p:nvSpPr>
+          <p:cNvPr id="39" name="Text 37"/>
+          <p:cNvSpPr/>
+          <p:nvPr/>
+        </p:nvSpPr>
+        <p:spPr>
+          <a:xfrm>
+            <a:off x="1839341" y="5596128"/>
+            <a:ext cx="183769" cy="329184"/>
+          </a:xfrm>
+          <a:prstGeom prst="rect">
+            <a:avLst/>
+          </a:prstGeom>
+          <a:noFill/>
+          <a:ln/>
+        </p:spPr>
+        <p:txBody>
+          <a:bodyPr wrap="none" lIns="0" tIns="0" rIns="0" bIns="0" rtlCol="0" anchor="ctr"/>
+          <a:lstStyle/>
+          <a:p>
+            <a:pPr indent="0" marL="0">
+              <a:buNone/>
+            </a:pPr>
+            <a:r>
+              <a:rPr lang="en-US" sz="700" dirty="0">
+                <a:solidFill>
+                  <a:srgbClr val="5B6B73"/>
+                </a:solidFill>
+                <a:latin typeface="맑은 고딕" pitchFamily="34" charset="0"/>
+                <a:ea typeface="맑은 고딕" pitchFamily="34" charset="-122"/>
+                <a:cs typeface="맑은 고딕" pitchFamily="34" charset="-120"/>
+              </a:rPr>
+              <a:t>'27</a:t>
+            </a:r>
+            <a:endParaRPr lang="en-US" sz="700" dirty="0"/>
+          </a:p>
+        </p:txBody>
+      </p:sp>
+      <p:sp>
+        <p:nvSpPr>
+          <p:cNvPr id="40" name="Shape 38"/>
+          <p:cNvSpPr/>
+          <p:nvPr/>
+        </p:nvSpPr>
+        <p:spPr>
+          <a:xfrm>
+            <a:off x="2059686" y="5705856"/>
+            <a:ext cx="118872" cy="109728"/>
+          </a:xfrm>
+          <a:prstGeom prst="rect">
+            <a:avLst/>
+          </a:prstGeom>
+          <a:solidFill>
+            <a:srgbClr val="C5B4E3"/>
+          </a:solidFill>
+          <a:ln w="6350">
+            <a:solidFill>
+              <a:srgbClr val="5B6B73"/>
+            </a:solidFill>
+            <a:prstDash val="solid"/>
+          </a:ln>
+        </p:spPr>
+      </p:sp>
+      <p:sp>
+        <p:nvSpPr>
+          <p:cNvPr id="41" name="Text 39"/>
+          <p:cNvSpPr/>
+          <p:nvPr/>
+        </p:nvSpPr>
+        <p:spPr>
+          <a:xfrm>
+            <a:off x="2215134" y="5596128"/>
+            <a:ext cx="183769" cy="329184"/>
+          </a:xfrm>
+          <a:prstGeom prst="rect">
+            <a:avLst/>
+          </a:prstGeom>
+          <a:noFill/>
+          <a:ln/>
+        </p:spPr>
+        <p:txBody>
+          <a:bodyPr wrap="none" lIns="0" tIns="0" rIns="0" bIns="0" rtlCol="0" anchor="ctr"/>
+          <a:lstStyle/>
+          <a:p>
+            <a:pPr indent="0" marL="0">
+              <a:buNone/>
+            </a:pPr>
+            <a:r>
+              <a:rPr lang="en-US" sz="700" dirty="0">
+                <a:solidFill>
+                  <a:srgbClr val="5B6B73"/>
+                </a:solidFill>
+                <a:latin typeface="맑은 고딕" pitchFamily="34" charset="0"/>
+                <a:ea typeface="맑은 고딕" pitchFamily="34" charset="-122"/>
+                <a:cs typeface="맑은 고딕" pitchFamily="34" charset="-120"/>
+              </a:rPr>
+              <a:t>'28</a:t>
+            </a:r>
+            <a:endParaRPr lang="en-US" sz="700" dirty="0"/>
           </a:p>
         </p:txBody>
       </p:sp>
@@ -1068,26 +2193,26 @@
           </p:nvPr>
         </p:nvGraphicFramePr>
         <p:xfrm>
-          <a:off x="3950208" y="1645920"/>
-          <a:ext cx="7674559" cy="914400"/>
+          <a:off x="2807208" y="1645920"/>
+          <a:ext cx="8817559" cy="914400"/>
         </p:xfrm>
         <a:graphic>
           <a:graphicData uri="http://schemas.openxmlformats.org/drawingml/2006/table">
             <a:tbl>
               <a:tblPr/>
               <a:tblGrid>
-                <a:gridCol w="438912"/>
-                <a:gridCol w="960120"/>
-                <a:gridCol w="804672"/>
+                <a:gridCol w="448056"/>
+                <a:gridCol w="3090672"/>
+                <a:gridCol w="685800"/>
                 <a:gridCol w="713232"/>
                 <a:gridCol w="713232"/>
+                <a:gridCol w="640080"/>
                 <a:gridCol w="713232"/>
-                <a:gridCol w="713232"/>
-                <a:gridCol w="713232"/>
-                <a:gridCol w="713232"/>
-                <a:gridCol w="1188720"/>
+                <a:gridCol w="576072"/>
+                <a:gridCol w="576072"/>
+                <a:gridCol w="658368"/>
               </a:tblGrid>
-              <a:tr h="337625">
+              <a:tr h="329184">
                 <a:tc>
                   <a:txBody>
                     <a:bodyPr/>
@@ -1699,7 +2824,7 @@
                   </a:tcPr>
                 </a:tc>
               </a:tr>
-              <a:tr h="337625">
+              <a:tr h="329184">
                 <a:tc>
                   <a:txBody>
                     <a:bodyPr/>
@@ -1785,7 +2910,7 @@
                           <a:ea typeface="맑은 고딕" pitchFamily="34" charset="-122"/>
                           <a:cs typeface="맑은 고딕" pitchFamily="34" charset="-120"/>
                         </a:rPr>
-                        <a:t>주식회사대한민국글로벌상업용부동산투…</a:t>
+                        <a:t>주식회사대한민국글로벌상업용부동산투자개발자산운용전문회사_본사</a:t>
                       </a:r>
                       <a:endParaRPr lang="en-US" sz="700" dirty="0">
                         <a:latin typeface="맑은 고딕" charset="0"/>
@@ -2057,7 +3182,7 @@
                           <a:ea typeface="맑은 고딕" pitchFamily="34" charset="-122"/>
                           <a:cs typeface="맑은 고딕" pitchFamily="34" charset="-120"/>
                         </a:rPr>
-                        <a:t>10000</a:t>
+                        <a:t>10,000</a:t>
                       </a:r>
                       <a:endParaRPr lang="en-US" sz="850" dirty="0">
                         <a:latin typeface="맑은 고딕" charset="0"/>
@@ -2381,7 +3506,7 @@
                   </a:tcPr>
                 </a:tc>
               </a:tr>
-              <a:tr h="337625">
+              <a:tr h="329184">
                 <a:tc>
                   <a:txBody>
                     <a:bodyPr/>
@@ -2459,7 +3584,7 @@
                         <a:buNone/>
                       </a:pPr>
                       <a:r>
-                        <a:rPr lang="en-US" sz="700" dirty="0">
+                        <a:rPr lang="en-US" sz="850" dirty="0">
                           <a:solidFill>
                             <a:srgbClr val="2B2B2B"/>
                           </a:solidFill>
@@ -2467,9 +3592,9 @@
                           <a:ea typeface="맑은 고딕" pitchFamily="34" charset="-122"/>
                           <a:cs typeface="맑은 고딕" pitchFamily="34" charset="-120"/>
                         </a:rPr>
-                        <a:t>메디컬케어네트워크의원및종합검진클리…</a:t>
-                      </a:r>
-                      <a:endParaRPr lang="en-US" sz="700" dirty="0">
+                        <a:t>메디컬케어네트워크의원및종합검진클리닉센터영등포지점</a:t>
+                      </a:r>
+                      <a:endParaRPr lang="en-US" sz="850" dirty="0">
                         <a:latin typeface="맑은 고딕" charset="0"/>
                         <a:ea typeface="맑은 고딕" charset="0"/>
                         <a:cs typeface="맑은 고딕" charset="0"/>
@@ -2739,7 +3864,7 @@
                           <a:ea typeface="맑은 고딕" pitchFamily="34" charset="-122"/>
                           <a:cs typeface="맑은 고딕" pitchFamily="34" charset="-120"/>
                         </a:rPr>
-                        <a:t>10000</a:t>
+                        <a:t>10,000</a:t>
                       </a:r>
                       <a:endParaRPr lang="en-US" sz="850" dirty="0">
                         <a:latin typeface="맑은 고딕" charset="0"/>
@@ -3063,7 +4188,7 @@
                   </a:tcPr>
                 </a:tc>
               </a:tr>
-              <a:tr h="337625">
+              <a:tr h="329184">
                 <a:tc>
                   <a:txBody>
                     <a:bodyPr/>
@@ -3141,7 +4266,7 @@
                         <a:buNone/>
                       </a:pPr>
                       <a:r>
-                        <a:rPr lang="en-US" sz="700" dirty="0">
+                        <a:rPr lang="en-US" sz="750" dirty="0">
                           <a:solidFill>
                             <a:srgbClr val="2B2B2B"/>
                           </a:solidFill>
@@ -3149,9 +4274,9 @@
                           <a:ea typeface="맑은 고딕" pitchFamily="34" charset="-122"/>
                           <a:cs typeface="맑은 고딕" pitchFamily="34" charset="-120"/>
                         </a:rPr>
-                        <a:t>주식회사한국엔터프라이즈소프트웨어인…</a:t>
-                      </a:r>
-                      <a:endParaRPr lang="en-US" sz="700" dirty="0">
+                        <a:t>주식회사한국엔터프라이즈소프트웨어인텔리전스클라우드솔루션즈</a:t>
+                      </a:r>
+                      <a:endParaRPr lang="en-US" sz="750" dirty="0">
                         <a:latin typeface="맑은 고딕" charset="0"/>
                         <a:ea typeface="맑은 고딕" charset="0"/>
                         <a:cs typeface="맑은 고딕" charset="0"/>
@@ -3421,7 +4546,7 @@
                           <a:ea typeface="맑은 고딕" pitchFamily="34" charset="-122"/>
                           <a:cs typeface="맑은 고딕" pitchFamily="34" charset="-120"/>
                         </a:rPr>
-                        <a:t>10000</a:t>
+                        <a:t>10,000</a:t>
                       </a:r>
                       <a:endParaRPr lang="en-US" sz="850" dirty="0">
                         <a:latin typeface="맑은 고딕" charset="0"/>
@@ -3745,7 +4870,7 @@
                   </a:tcPr>
                 </a:tc>
               </a:tr>
-              <a:tr h="337625">
+              <a:tr h="329184">
                 <a:tc>
                   <a:txBody>
                     <a:bodyPr/>
@@ -3823,7 +4948,7 @@
                         <a:buNone/>
                       </a:pPr>
                       <a:r>
-                        <a:rPr lang="en-US" sz="700" dirty="0">
+                        <a:rPr lang="en-US" sz="850" dirty="0">
                           <a:solidFill>
                             <a:srgbClr val="2B2B2B"/>
                           </a:solidFill>
@@ -3831,9 +4956,9 @@
                           <a:ea typeface="맑은 고딕" pitchFamily="34" charset="-122"/>
                           <a:cs typeface="맑은 고딕" pitchFamily="34" charset="-120"/>
                         </a:rPr>
-                        <a:t>법무법인대한국민종합법률사무소금융부…</a:t>
-                      </a:r>
-                      <a:endParaRPr lang="en-US" sz="700" dirty="0">
+                        <a:t>법무법인대한국민종합법률사무소금융부동산전담변호인단</a:t>
+                      </a:r>
+                      <a:endParaRPr lang="en-US" sz="850" dirty="0">
                         <a:latin typeface="맑은 고딕" charset="0"/>
                         <a:ea typeface="맑은 고딕" charset="0"/>
                         <a:cs typeface="맑은 고딕" charset="0"/>
@@ -4103,7 +5228,7 @@
                           <a:ea typeface="맑은 고딕" pitchFamily="34" charset="-122"/>
                           <a:cs typeface="맑은 고딕" pitchFamily="34" charset="-120"/>
                         </a:rPr>
-                        <a:t>10000</a:t>
+                        <a:t>10,000</a:t>
                       </a:r>
                       <a:endParaRPr lang="en-US" sz="850" dirty="0">
                         <a:latin typeface="맑은 고딕" charset="0"/>
@@ -4427,7 +5552,7 @@
                   </a:tcPr>
                 </a:tc>
               </a:tr>
-              <a:tr h="337625">
+              <a:tr h="329184">
                 <a:tc>
                   <a:txBody>
                     <a:bodyPr/>
@@ -4505,7 +5630,7 @@
                         <a:buNone/>
                       </a:pPr>
                       <a:r>
-                        <a:rPr lang="en-US" sz="700" dirty="0">
+                        <a:rPr lang="en-US" sz="850" dirty="0">
                           <a:solidFill>
                             <a:srgbClr val="2B2B2B"/>
                           </a:solidFill>
@@ -4513,9 +5638,9 @@
                           <a:ea typeface="맑은 고딕" pitchFamily="34" charset="-122"/>
                           <a:cs typeface="맑은 고딕" pitchFamily="34" charset="-120"/>
                         </a:rPr>
-                        <a:t>삼정세무회계사무소공인회계사및세무전…</a:t>
-                      </a:r>
-                      <a:endParaRPr lang="en-US" sz="700" dirty="0">
+                        <a:t>삼정세무회계사무소공인회계사및세무전문컨설팅그룹</a:t>
+                      </a:r>
+                      <a:endParaRPr lang="en-US" sz="850" dirty="0">
                         <a:latin typeface="맑은 고딕" charset="0"/>
                         <a:ea typeface="맑은 고딕" charset="0"/>
                         <a:cs typeface="맑은 고딕" charset="0"/>
@@ -4785,7 +5910,7 @@
                           <a:ea typeface="맑은 고딕" pitchFamily="34" charset="-122"/>
                           <a:cs typeface="맑은 고딕" pitchFamily="34" charset="-120"/>
                         </a:rPr>
-                        <a:t>10000</a:t>
+                        <a:t>10,000</a:t>
                       </a:r>
                       <a:endParaRPr lang="en-US" sz="850" dirty="0">
                         <a:latin typeface="맑은 고딕" charset="0"/>
@@ -5109,7 +6234,7 @@
                   </a:tcPr>
                 </a:tc>
               </a:tr>
-              <a:tr h="337625">
+              <a:tr h="329184">
                 <a:tc>
                   <a:txBody>
                     <a:bodyPr/>
@@ -5187,7 +6312,7 @@
                         <a:buNone/>
                       </a:pPr>
                       <a:r>
-                        <a:rPr lang="en-US" sz="700" dirty="0">
+                        <a:rPr lang="en-US" sz="850" dirty="0">
                           <a:solidFill>
                             <a:srgbClr val="2B2B2B"/>
                           </a:solidFill>
@@ -5195,9 +6320,9 @@
                           <a:ea typeface="맑은 고딕" pitchFamily="34" charset="-122"/>
                           <a:cs typeface="맑은 고딕" pitchFamily="34" charset="-120"/>
                         </a:rPr>
-                        <a:t>주식회사넥스트제너레이션바이오테크놀…</a:t>
-                      </a:r>
-                      <a:endParaRPr lang="en-US" sz="700" dirty="0">
+                        <a:t>주식회사넥스트제너레이션바이오테크놀로지알앤디연구센터</a:t>
+                      </a:r>
+                      <a:endParaRPr lang="en-US" sz="850" dirty="0">
                         <a:latin typeface="맑은 고딕" charset="0"/>
                         <a:ea typeface="맑은 고딕" charset="0"/>
                         <a:cs typeface="맑은 고딕" charset="0"/>
@@ -5467,7 +6592,7 @@
                           <a:ea typeface="맑은 고딕" pitchFamily="34" charset="-122"/>
                           <a:cs typeface="맑은 고딕" pitchFamily="34" charset="-120"/>
                         </a:rPr>
-                        <a:t>10000</a:t>
+                        <a:t>10,000</a:t>
                       </a:r>
                       <a:endParaRPr lang="en-US" sz="850" dirty="0">
                         <a:latin typeface="맑은 고딕" charset="0"/>
@@ -5791,7 +6916,7 @@
                   </a:tcPr>
                 </a:tc>
               </a:tr>
-              <a:tr h="337625">
+              <a:tr h="329184">
                 <a:tc>
                   <a:txBody>
                     <a:bodyPr/>
@@ -5869,7 +6994,7 @@
                         <a:buNone/>
                       </a:pPr>
                       <a:r>
-                        <a:rPr lang="en-US" sz="700" dirty="0">
+                        <a:rPr lang="en-US" sz="850" dirty="0">
                           <a:solidFill>
                             <a:srgbClr val="2B2B2B"/>
                           </a:solidFill>
@@ -5877,9 +7002,9 @@
                           <a:ea typeface="맑은 고딕" pitchFamily="34" charset="-122"/>
                           <a:cs typeface="맑은 고딕" pitchFamily="34" charset="-120"/>
                         </a:rPr>
-                        <a:t>에이아이인공지능딥러닝로보틱스응용연…</a:t>
-                      </a:r>
-                      <a:endParaRPr lang="en-US" sz="700" dirty="0">
+                        <a:t>에이아이인공지능딥러닝로보틱스응용연구개발실험실</a:t>
+                      </a:r>
+                      <a:endParaRPr lang="en-US" sz="850" dirty="0">
                         <a:latin typeface="맑은 고딕" charset="0"/>
                         <a:ea typeface="맑은 고딕" charset="0"/>
                         <a:cs typeface="맑은 고딕" charset="0"/>
@@ -6149,7 +7274,7 @@
                           <a:ea typeface="맑은 고딕" pitchFamily="34" charset="-122"/>
                           <a:cs typeface="맑은 고딕" pitchFamily="34" charset="-120"/>
                         </a:rPr>
-                        <a:t>10000</a:t>
+                        <a:t>10,000</a:t>
                       </a:r>
                       <a:endParaRPr lang="en-US" sz="850" dirty="0">
                         <a:latin typeface="맑은 고딕" charset="0"/>
@@ -6473,7 +7598,7 @@
                   </a:tcPr>
                 </a:tc>
               </a:tr>
-              <a:tr h="337625">
+              <a:tr h="329184">
                 <a:tc>
                   <a:txBody>
                     <a:bodyPr/>
@@ -6551,7 +7676,7 @@
                         <a:buNone/>
                       </a:pPr>
                       <a:r>
-                        <a:rPr lang="en-US" sz="700" dirty="0">
+                        <a:rPr lang="en-US" sz="850" dirty="0">
                           <a:solidFill>
                             <a:srgbClr val="2B2B2B"/>
                           </a:solidFill>
@@ -6559,9 +7684,9 @@
                           <a:ea typeface="맑은 고딕" pitchFamily="34" charset="-122"/>
                           <a:cs typeface="맑은 고딕" pitchFamily="34" charset="-120"/>
                         </a:rPr>
-                        <a:t>글로벌로지스틱스서플라이체인매니지먼…</a:t>
-                      </a:r>
-                      <a:endParaRPr lang="en-US" sz="700" dirty="0">
+                        <a:t>글로벌로지스틱스서플라이체인매니지먼트한국물류지사</a:t>
+                      </a:r>
+                      <a:endParaRPr lang="en-US" sz="850" dirty="0">
                         <a:latin typeface="맑은 고딕" charset="0"/>
                         <a:ea typeface="맑은 고딕" charset="0"/>
                         <a:cs typeface="맑은 고딕" charset="0"/>
@@ -6831,7 +7956,7 @@
                           <a:ea typeface="맑은 고딕" pitchFamily="34" charset="-122"/>
                           <a:cs typeface="맑은 고딕" pitchFamily="34" charset="-120"/>
                         </a:rPr>
-                        <a:t>10000</a:t>
+                        <a:t>10,000</a:t>
                       </a:r>
                       <a:endParaRPr lang="en-US" sz="850" dirty="0">
                         <a:latin typeface="맑은 고딕" charset="0"/>
@@ -7155,7 +8280,7 @@
                   </a:tcPr>
                 </a:tc>
               </a:tr>
-              <a:tr h="337625">
+              <a:tr h="329184">
                 <a:tc>
                   <a:txBody>
                     <a:bodyPr/>
@@ -7233,7 +8358,7 @@
                         <a:buNone/>
                       </a:pPr>
                       <a:r>
-                        <a:rPr lang="en-US" sz="700" dirty="0">
+                        <a:rPr lang="en-US" sz="850" dirty="0">
                           <a:solidFill>
                             <a:srgbClr val="2B2B2B"/>
                           </a:solidFill>
@@ -7241,9 +8366,9 @@
                           <a:ea typeface="맑은 고딕" pitchFamily="34" charset="-122"/>
                           <a:cs typeface="맑은 고딕" pitchFamily="34" charset="-120"/>
                         </a:rPr>
-                        <a:t>주식회사케이비부동산신탁부동산금융수…</a:t>
-                      </a:r>
-                      <a:endParaRPr lang="en-US" sz="700" dirty="0">
+                        <a:t>주식회사케이비부동산신탁부동산금융수탁투자관리부</a:t>
+                      </a:r>
+                      <a:endParaRPr lang="en-US" sz="850" dirty="0">
                         <a:latin typeface="맑은 고딕" charset="0"/>
                         <a:ea typeface="맑은 고딕" charset="0"/>
                         <a:cs typeface="맑은 고딕" charset="0"/>
@@ -7513,7 +8638,7 @@
                           <a:ea typeface="맑은 고딕" pitchFamily="34" charset="-122"/>
                           <a:cs typeface="맑은 고딕" pitchFamily="34" charset="-120"/>
                         </a:rPr>
-                        <a:t>10000</a:t>
+                        <a:t>10,000</a:t>
                       </a:r>
                       <a:endParaRPr lang="en-US" sz="850" dirty="0">
                         <a:latin typeface="맑은 고딕" charset="0"/>
@@ -7837,7 +8962,7 @@
                   </a:tcPr>
                 </a:tc>
               </a:tr>
-              <a:tr h="337625">
+              <a:tr h="329184">
                 <a:tc>
                   <a:txBody>
                     <a:bodyPr/>
@@ -7915,7 +9040,7 @@
                         <a:buNone/>
                       </a:pPr>
                       <a:r>
-                        <a:rPr lang="en-US" sz="700" dirty="0">
+                        <a:rPr lang="en-US" sz="850" dirty="0">
                           <a:solidFill>
                             <a:srgbClr val="2B2B2B"/>
                           </a:solidFill>
@@ -7923,9 +9048,9 @@
                           <a:ea typeface="맑은 고딕" pitchFamily="34" charset="-122"/>
                           <a:cs typeface="맑은 고딕" pitchFamily="34" charset="-120"/>
                         </a:rPr>
-                        <a:t>스타벅스코리아리저브당산역프리미엄드…</a:t>
-                      </a:r>
-                      <a:endParaRPr lang="en-US" sz="700" dirty="0">
+                        <a:t>스타벅스코리아리저브당산역프리미엄드라이브스루매장점</a:t>
+                      </a:r>
+                      <a:endParaRPr lang="en-US" sz="850" dirty="0">
                         <a:latin typeface="맑은 고딕" charset="0"/>
                         <a:ea typeface="맑은 고딕" charset="0"/>
                         <a:cs typeface="맑은 고딕" charset="0"/>
@@ -8195,7 +9320,7 @@
                           <a:ea typeface="맑은 고딕" pitchFamily="34" charset="-122"/>
                           <a:cs typeface="맑은 고딕" pitchFamily="34" charset="-120"/>
                         </a:rPr>
-                        <a:t>20000</a:t>
+                        <a:t>20,000</a:t>
                       </a:r>
                       <a:endParaRPr lang="en-US" sz="850" dirty="0">
                         <a:latin typeface="맑은 고딕" charset="0"/>
@@ -8263,7 +9388,7 @@
                           <a:ea typeface="맑은 고딕" pitchFamily="34" charset="-122"/>
                           <a:cs typeface="맑은 고딕" pitchFamily="34" charset="-120"/>
                         </a:rPr>
-                        <a:t>1500</a:t>
+                        <a:t>1,500</a:t>
                       </a:r>
                       <a:endParaRPr lang="en-US" sz="850" dirty="0">
                         <a:latin typeface="맑은 고딕" charset="0"/>
@@ -8399,7 +9524,7 @@
                           <a:ea typeface="맑은 고딕" pitchFamily="34" charset="-122"/>
                           <a:cs typeface="맑은 고딕" pitchFamily="34" charset="-120"/>
                         </a:rPr>
-                        <a:t>1650</a:t>
+                        <a:t>1,650</a:t>
                       </a:r>
                       <a:endParaRPr lang="en-US" sz="850" dirty="0">
                         <a:latin typeface="맑은 고딕" charset="0"/>
@@ -8519,7 +9644,7 @@
                   </a:tcPr>
                 </a:tc>
               </a:tr>
-              <a:tr h="337625">
+              <a:tr h="329184">
                 <a:tc>
                   <a:txBody>
                     <a:bodyPr/>
@@ -8529,9 +9654,9 @@
                         <a:buNone/>
                       </a:pPr>
                       <a:r>
-                        <a:rPr lang="en-US" sz="850" dirty="0">
-                          <a:solidFill>
-                            <a:srgbClr val="2B2B2B"/>
+                        <a:rPr lang="en-US" sz="850" b="1" dirty="0">
+                          <a:solidFill>
+                            <a:srgbClr val="B05A2E"/>
                           </a:solidFill>
                           <a:latin typeface="맑은 고딕" pitchFamily="34" charset="0"/>
                           <a:ea typeface="맑은 고딕" pitchFamily="34" charset="-122"/>
@@ -8584,7 +9709,7 @@
                       <a:tailEnd type="none" w="med" len="med"/>
                     </a:lnB>
                     <a:solidFill>
-                      <a:srgbClr val="FFFFFF"/>
+                      <a:srgbClr val="FBEFE8"/>
                     </a:solidFill>
                   </a:tcPr>
                 </a:tc>
@@ -8597,9 +9722,9 @@
                         <a:buNone/>
                       </a:pPr>
                       <a:r>
-                        <a:rPr lang="en-US" sz="850" dirty="0">
-                          <a:solidFill>
-                            <a:srgbClr val="2B2B2B"/>
+                        <a:rPr lang="en-US" sz="850" b="1" dirty="0">
+                          <a:solidFill>
+                            <a:srgbClr val="B05A2E"/>
                           </a:solidFill>
                           <a:latin typeface="맑은 고딕" pitchFamily="34" charset="0"/>
                           <a:ea typeface="맑은 고딕" pitchFamily="34" charset="-122"/>
@@ -8652,7 +9777,7 @@
                       <a:tailEnd type="none" w="med" len="med"/>
                     </a:lnB>
                     <a:solidFill>
-                      <a:srgbClr val="FFFFFF"/>
+                      <a:srgbClr val="FBEFE8"/>
                     </a:solidFill>
                   </a:tcPr>
                 </a:tc>
@@ -8665,9 +9790,9 @@
                         <a:buNone/>
                       </a:pPr>
                       <a:r>
-                        <a:rPr lang="en-US" sz="850" dirty="0">
-                          <a:solidFill>
-                            <a:srgbClr val="2B2B2B"/>
+                        <a:rPr lang="en-US" sz="850" b="1" dirty="0">
+                          <a:solidFill>
+                            <a:srgbClr val="B05A2E"/>
                           </a:solidFill>
                           <a:latin typeface="맑은 고딕" pitchFamily="34" charset="0"/>
                           <a:ea typeface="맑은 고딕" pitchFamily="34" charset="-122"/>
@@ -8720,7 +9845,7 @@
                       <a:tailEnd type="none" w="med" len="med"/>
                     </a:lnB>
                     <a:solidFill>
-                      <a:srgbClr val="FFFFFF"/>
+                      <a:srgbClr val="FBEFE8"/>
                     </a:solidFill>
                   </a:tcPr>
                 </a:tc>
@@ -8733,9 +9858,9 @@
                         <a:buNone/>
                       </a:pPr>
                       <a:r>
-                        <a:rPr lang="en-US" sz="850" dirty="0">
-                          <a:solidFill>
-                            <a:srgbClr val="2B2B2B"/>
+                        <a:rPr lang="en-US" sz="850" b="1" dirty="0">
+                          <a:solidFill>
+                            <a:srgbClr val="B05A2E"/>
                           </a:solidFill>
                           <a:latin typeface="맑은 고딕" pitchFamily="34" charset="0"/>
                           <a:ea typeface="맑은 고딕" pitchFamily="34" charset="-122"/>
@@ -8788,7 +9913,7 @@
                       <a:tailEnd type="none" w="med" len="med"/>
                     </a:lnB>
                     <a:solidFill>
-                      <a:srgbClr val="FFFFFF"/>
+                      <a:srgbClr val="FBEFE8"/>
                     </a:solidFill>
                   </a:tcPr>
                 </a:tc>
@@ -8801,9 +9926,9 @@
                         <a:buNone/>
                       </a:pPr>
                       <a:r>
-                        <a:rPr lang="en-US" sz="850" dirty="0">
-                          <a:solidFill>
-                            <a:srgbClr val="2B2B2B"/>
+                        <a:rPr lang="en-US" sz="850" b="1" dirty="0">
+                          <a:solidFill>
+                            <a:srgbClr val="B05A2E"/>
                           </a:solidFill>
                           <a:latin typeface="맑은 고딕" pitchFamily="34" charset="0"/>
                           <a:ea typeface="맑은 고딕" pitchFamily="34" charset="-122"/>
@@ -8856,7 +9981,7 @@
                       <a:tailEnd type="none" w="med" len="med"/>
                     </a:lnB>
                     <a:solidFill>
-                      <a:srgbClr val="FFFFFF"/>
+                      <a:srgbClr val="FBEFE8"/>
                     </a:solidFill>
                   </a:tcPr>
                 </a:tc>
@@ -8869,9 +9994,9 @@
                         <a:buNone/>
                       </a:pPr>
                       <a:r>
-                        <a:rPr lang="en-US" sz="850" dirty="0">
-                          <a:solidFill>
-                            <a:srgbClr val="2B2B2B"/>
+                        <a:rPr lang="en-US" sz="850" b="1" dirty="0">
+                          <a:solidFill>
+                            <a:srgbClr val="B05A2E"/>
                           </a:solidFill>
                           <a:latin typeface="맑은 고딕" pitchFamily="34" charset="0"/>
                           <a:ea typeface="맑은 고딕" pitchFamily="34" charset="-122"/>
@@ -8924,7 +10049,7 @@
                       <a:tailEnd type="none" w="med" len="med"/>
                     </a:lnB>
                     <a:solidFill>
-                      <a:srgbClr val="FFFFFF"/>
+                      <a:srgbClr val="FBEFE8"/>
                     </a:solidFill>
                   </a:tcPr>
                 </a:tc>
@@ -8937,9 +10062,9 @@
                         <a:buNone/>
                       </a:pPr>
                       <a:r>
-                        <a:rPr lang="en-US" sz="850" dirty="0">
-                          <a:solidFill>
-                            <a:srgbClr val="2B2B2B"/>
+                        <a:rPr lang="en-US" sz="850" b="1" dirty="0">
+                          <a:solidFill>
+                            <a:srgbClr val="B05A2E"/>
                           </a:solidFill>
                           <a:latin typeface="맑은 고딕" pitchFamily="34" charset="0"/>
                           <a:ea typeface="맑은 고딕" pitchFamily="34" charset="-122"/>
@@ -8992,7 +10117,7 @@
                       <a:tailEnd type="none" w="med" len="med"/>
                     </a:lnB>
                     <a:solidFill>
-                      <a:srgbClr val="FFFFFF"/>
+                      <a:srgbClr val="FBEFE8"/>
                     </a:solidFill>
                   </a:tcPr>
                 </a:tc>
@@ -9005,9 +10130,9 @@
                         <a:buNone/>
                       </a:pPr>
                       <a:r>
-                        <a:rPr lang="en-US" sz="850" dirty="0">
-                          <a:solidFill>
-                            <a:srgbClr val="2B2B2B"/>
+                        <a:rPr lang="en-US" sz="850" b="1" dirty="0">
+                          <a:solidFill>
+                            <a:srgbClr val="B05A2E"/>
                           </a:solidFill>
                           <a:latin typeface="맑은 고딕" pitchFamily="34" charset="0"/>
                           <a:ea typeface="맑은 고딕" pitchFamily="34" charset="-122"/>
@@ -9060,7 +10185,7 @@
                       <a:tailEnd type="none" w="med" len="med"/>
                     </a:lnB>
                     <a:solidFill>
-                      <a:srgbClr val="FFFFFF"/>
+                      <a:srgbClr val="FBEFE8"/>
                     </a:solidFill>
                   </a:tcPr>
                 </a:tc>
@@ -9073,9 +10198,9 @@
                         <a:buNone/>
                       </a:pPr>
                       <a:r>
-                        <a:rPr lang="en-US" sz="850" dirty="0">
-                          <a:solidFill>
-                            <a:srgbClr val="2B2B2B"/>
+                        <a:rPr lang="en-US" sz="850" b="1" dirty="0">
+                          <a:solidFill>
+                            <a:srgbClr val="B05A2E"/>
                           </a:solidFill>
                           <a:latin typeface="맑은 고딕" pitchFamily="34" charset="0"/>
                           <a:ea typeface="맑은 고딕" pitchFamily="34" charset="-122"/>
@@ -9128,7 +10253,7 @@
                       <a:tailEnd type="none" w="med" len="med"/>
                     </a:lnB>
                     <a:solidFill>
-                      <a:srgbClr val="FFFFFF"/>
+                      <a:srgbClr val="FBEFE8"/>
                     </a:solidFill>
                   </a:tcPr>
                 </a:tc>
@@ -9141,9 +10266,9 @@
                         <a:buNone/>
                       </a:pPr>
                       <a:r>
-                        <a:rPr lang="en-US" sz="850" dirty="0">
-                          <a:solidFill>
-                            <a:srgbClr val="2B2B2B"/>
+                        <a:rPr lang="en-US" sz="850" b="1" dirty="0">
+                          <a:solidFill>
+                            <a:srgbClr val="B05A2E"/>
                           </a:solidFill>
                           <a:latin typeface="맑은 고딕" pitchFamily="34" charset="0"/>
                           <a:ea typeface="맑은 고딕" pitchFamily="34" charset="-122"/>
@@ -9196,12 +10321,12 @@
                       <a:tailEnd type="none" w="med" len="med"/>
                     </a:lnB>
                     <a:solidFill>
-                      <a:srgbClr val="FFFFFF"/>
+                      <a:srgbClr val="FBEFE8"/>
                     </a:solidFill>
                   </a:tcPr>
                 </a:tc>
               </a:tr>
-              <a:tr h="337625">
+              <a:tr h="329184">
                 <a:tc>
                   <a:txBody>
                     <a:bodyPr/>
@@ -9211,9 +10336,9 @@
                         <a:buNone/>
                       </a:pPr>
                       <a:r>
-                        <a:rPr lang="en-US" sz="850" dirty="0">
-                          <a:solidFill>
-                            <a:srgbClr val="2B2B2B"/>
+                        <a:rPr lang="en-US" sz="850" b="1" dirty="0">
+                          <a:solidFill>
+                            <a:srgbClr val="10161F"/>
                           </a:solidFill>
                           <a:latin typeface="맑은 고딕" pitchFamily="34" charset="0"/>
                           <a:ea typeface="맑은 고딕" pitchFamily="34" charset="-122"/>
@@ -9266,7 +10391,7 @@
                       <a:tailEnd type="none" w="med" len="med"/>
                     </a:lnB>
                     <a:solidFill>
-                      <a:srgbClr val="F3F6F7"/>
+                      <a:srgbClr val="F5F7F9"/>
                     </a:solidFill>
                   </a:tcPr>
                 </a:tc>
@@ -9278,52 +10403,63 @@
                       <a:pPr algn="l" indent="0" marL="0">
                         <a:buNone/>
                       </a:pPr>
-                      <a:endParaRPr lang="en-US" sz="850" dirty="0">
-                        <a:latin typeface="맑은 고딕" charset="0"/>
-                        <a:ea typeface="맑은 고딕" charset="0"/>
-                        <a:cs typeface="맑은 고딕" charset="0"/>
-                      </a:endParaRPr>
-                    </a:p>
-                  </a:txBody>
-                  <a:tcPr marL="50800" marR="50800" marT="25400" marB="25400" anchor="ctr">
-                    <a:lnL w="3810" cap="flat" cmpd="sng" algn="ctr">
-                      <a:solidFill>
-                        <a:srgbClr val="DDE3E8"/>
-                      </a:solidFill>
-                      <a:prstDash val="solid"/>
-                      <a:round/>
-                      <a:headEnd type="none" w="med" len="med"/>
-                      <a:tailEnd type="none" w="med" len="med"/>
-                    </a:lnL>
-                    <a:lnR w="3810" cap="flat" cmpd="sng" algn="ctr">
-                      <a:solidFill>
-                        <a:srgbClr val="DDE3E8"/>
-                      </a:solidFill>
-                      <a:prstDash val="solid"/>
-                      <a:round/>
-                      <a:headEnd type="none" w="med" len="med"/>
-                      <a:tailEnd type="none" w="med" len="med"/>
-                    </a:lnR>
-                    <a:lnT w="3810" cap="flat" cmpd="sng" algn="ctr">
-                      <a:solidFill>
-                        <a:srgbClr val="DDE3E8"/>
-                      </a:solidFill>
-                      <a:prstDash val="solid"/>
-                      <a:round/>
-                      <a:headEnd type="none" w="med" len="med"/>
-                      <a:tailEnd type="none" w="med" len="med"/>
-                    </a:lnT>
-                    <a:lnB w="3810" cap="flat" cmpd="sng" algn="ctr">
-                      <a:solidFill>
-                        <a:srgbClr val="DDE3E8"/>
-                      </a:solidFill>
-                      <a:prstDash val="solid"/>
-                      <a:round/>
-                      <a:headEnd type="none" w="med" len="med"/>
-                      <a:tailEnd type="none" w="med" len="med"/>
-                    </a:lnB>
-                    <a:solidFill>
-                      <a:srgbClr val="F3F6F7"/>
+                      <a:r>
+                        <a:rPr lang="en-US" sz="850" b="1" dirty="0">
+                          <a:solidFill>
+                            <a:srgbClr val="10161F"/>
+                          </a:solidFill>
+                          <a:latin typeface="맑은 고딕" pitchFamily="34" charset="0"/>
+                          <a:ea typeface="맑은 고딕" pitchFamily="34" charset="-122"/>
+                          <a:cs typeface="맑은 고딕" pitchFamily="34" charset="-120"/>
+                        </a:rPr>
+                        <a:t>11개 호실</a:t>
+                      </a:r>
+                      <a:endParaRPr lang="en-US" sz="850" dirty="0">
+                        <a:latin typeface="맑은 고딕" charset="0"/>
+                        <a:ea typeface="맑은 고딕" charset="0"/>
+                        <a:cs typeface="맑은 고딕" charset="0"/>
+                      </a:endParaRPr>
+                    </a:p>
+                  </a:txBody>
+                  <a:tcPr marL="50800" marR="50800" marT="25400" marB="25400" anchor="ctr">
+                    <a:lnL w="3810" cap="flat" cmpd="sng" algn="ctr">
+                      <a:solidFill>
+                        <a:srgbClr val="DDE3E8"/>
+                      </a:solidFill>
+                      <a:prstDash val="solid"/>
+                      <a:round/>
+                      <a:headEnd type="none" w="med" len="med"/>
+                      <a:tailEnd type="none" w="med" len="med"/>
+                    </a:lnL>
+                    <a:lnR w="3810" cap="flat" cmpd="sng" algn="ctr">
+                      <a:solidFill>
+                        <a:srgbClr val="DDE3E8"/>
+                      </a:solidFill>
+                      <a:prstDash val="solid"/>
+                      <a:round/>
+                      <a:headEnd type="none" w="med" len="med"/>
+                      <a:tailEnd type="none" w="med" len="med"/>
+                    </a:lnR>
+                    <a:lnT w="3810" cap="flat" cmpd="sng" algn="ctr">
+                      <a:solidFill>
+                        <a:srgbClr val="DDE3E8"/>
+                      </a:solidFill>
+                      <a:prstDash val="solid"/>
+                      <a:round/>
+                      <a:headEnd type="none" w="med" len="med"/>
+                      <a:tailEnd type="none" w="med" len="med"/>
+                    </a:lnT>
+                    <a:lnB w="3810" cap="flat" cmpd="sng" algn="ctr">
+                      <a:solidFill>
+                        <a:srgbClr val="DDE3E8"/>
+                      </a:solidFill>
+                      <a:prstDash val="solid"/>
+                      <a:round/>
+                      <a:headEnd type="none" w="med" len="med"/>
+                      <a:tailEnd type="none" w="med" len="med"/>
+                    </a:lnB>
+                    <a:solidFill>
+                      <a:srgbClr val="F5F7F9"/>
                     </a:solidFill>
                   </a:tcPr>
                 </a:tc>
@@ -9335,52 +10471,63 @@
                       <a:pPr algn="ctr" indent="0" marL="0">
                         <a:buNone/>
                       </a:pPr>
-                      <a:endParaRPr lang="en-US" sz="850" dirty="0">
-                        <a:latin typeface="맑은 고딕" charset="0"/>
-                        <a:ea typeface="맑은 고딕" charset="0"/>
-                        <a:cs typeface="맑은 고딕" charset="0"/>
-                      </a:endParaRPr>
-                    </a:p>
-                  </a:txBody>
-                  <a:tcPr marL="50800" marR="50800" marT="25400" marB="25400" anchor="ctr">
-                    <a:lnL w="3810" cap="flat" cmpd="sng" algn="ctr">
-                      <a:solidFill>
-                        <a:srgbClr val="DDE3E8"/>
-                      </a:solidFill>
-                      <a:prstDash val="solid"/>
-                      <a:round/>
-                      <a:headEnd type="none" w="med" len="med"/>
-                      <a:tailEnd type="none" w="med" len="med"/>
-                    </a:lnL>
-                    <a:lnR w="3810" cap="flat" cmpd="sng" algn="ctr">
-                      <a:solidFill>
-                        <a:srgbClr val="DDE3E8"/>
-                      </a:solidFill>
-                      <a:prstDash val="solid"/>
-                      <a:round/>
-                      <a:headEnd type="none" w="med" len="med"/>
-                      <a:tailEnd type="none" w="med" len="med"/>
-                    </a:lnR>
-                    <a:lnT w="3810" cap="flat" cmpd="sng" algn="ctr">
-                      <a:solidFill>
-                        <a:srgbClr val="DDE3E8"/>
-                      </a:solidFill>
-                      <a:prstDash val="solid"/>
-                      <a:round/>
-                      <a:headEnd type="none" w="med" len="med"/>
-                      <a:tailEnd type="none" w="med" len="med"/>
-                    </a:lnT>
-                    <a:lnB w="3810" cap="flat" cmpd="sng" algn="ctr">
-                      <a:solidFill>
-                        <a:srgbClr val="DDE3E8"/>
-                      </a:solidFill>
-                      <a:prstDash val="solid"/>
-                      <a:round/>
-                      <a:headEnd type="none" w="med" len="med"/>
-                      <a:tailEnd type="none" w="med" len="med"/>
-                    </a:lnB>
-                    <a:solidFill>
-                      <a:srgbClr val="F3F6F7"/>
+                      <a:r>
+                        <a:rPr lang="en-US" sz="850" b="1" dirty="0">
+                          <a:solidFill>
+                            <a:srgbClr val="10161F"/>
+                          </a:solidFill>
+                          <a:latin typeface="맑은 고딕" pitchFamily="34" charset="0"/>
+                          <a:ea typeface="맑은 고딕" pitchFamily="34" charset="-122"/>
+                          <a:cs typeface="맑은 고딕" pitchFamily="34" charset="-120"/>
+                        </a:rPr>
+                        <a:t>-</a:t>
+                      </a:r>
+                      <a:endParaRPr lang="en-US" sz="850" dirty="0">
+                        <a:latin typeface="맑은 고딕" charset="0"/>
+                        <a:ea typeface="맑은 고딕" charset="0"/>
+                        <a:cs typeface="맑은 고딕" charset="0"/>
+                      </a:endParaRPr>
+                    </a:p>
+                  </a:txBody>
+                  <a:tcPr marL="50800" marR="50800" marT="25400" marB="25400" anchor="ctr">
+                    <a:lnL w="3810" cap="flat" cmpd="sng" algn="ctr">
+                      <a:solidFill>
+                        <a:srgbClr val="DDE3E8"/>
+                      </a:solidFill>
+                      <a:prstDash val="solid"/>
+                      <a:round/>
+                      <a:headEnd type="none" w="med" len="med"/>
+                      <a:tailEnd type="none" w="med" len="med"/>
+                    </a:lnL>
+                    <a:lnR w="3810" cap="flat" cmpd="sng" algn="ctr">
+                      <a:solidFill>
+                        <a:srgbClr val="DDE3E8"/>
+                      </a:solidFill>
+                      <a:prstDash val="solid"/>
+                      <a:round/>
+                      <a:headEnd type="none" w="med" len="med"/>
+                      <a:tailEnd type="none" w="med" len="med"/>
+                    </a:lnR>
+                    <a:lnT w="3810" cap="flat" cmpd="sng" algn="ctr">
+                      <a:solidFill>
+                        <a:srgbClr val="DDE3E8"/>
+                      </a:solidFill>
+                      <a:prstDash val="solid"/>
+                      <a:round/>
+                      <a:headEnd type="none" w="med" len="med"/>
+                      <a:tailEnd type="none" w="med" len="med"/>
+                    </a:lnT>
+                    <a:lnB w="3810" cap="flat" cmpd="sng" algn="ctr">
+                      <a:solidFill>
+                        <a:srgbClr val="DDE3E8"/>
+                      </a:solidFill>
+                      <a:prstDash val="solid"/>
+                      <a:round/>
+                      <a:headEnd type="none" w="med" len="med"/>
+                      <a:tailEnd type="none" w="med" len="med"/>
+                    </a:lnB>
+                    <a:solidFill>
+                      <a:srgbClr val="F5F7F9"/>
                     </a:solidFill>
                   </a:tcPr>
                 </a:tc>
@@ -9393,62 +10540,62 @@
                         <a:buNone/>
                       </a:pPr>
                       <a:r>
-                        <a:rPr lang="en-US" sz="850" dirty="0">
-                          <a:solidFill>
-                            <a:srgbClr val="2B2B2B"/>
-                          </a:solidFill>
-                          <a:latin typeface="맑은 고딕" pitchFamily="34" charset="0"/>
-                          <a:ea typeface="맑은 고딕" pitchFamily="34" charset="-122"/>
-                          <a:cs typeface="맑은 고딕" pitchFamily="34" charset="-120"/>
-                        </a:rPr>
-                        <a:t>11개 호실</a:t>
-                      </a:r>
-                      <a:endParaRPr lang="en-US" sz="850" dirty="0">
-                        <a:latin typeface="맑은 고딕" charset="0"/>
-                        <a:ea typeface="맑은 고딕" charset="0"/>
-                        <a:cs typeface="맑은 고딕" charset="0"/>
-                      </a:endParaRPr>
-                    </a:p>
-                  </a:txBody>
-                  <a:tcPr marL="50800" marR="50800" marT="25400" marB="25400" anchor="ctr">
-                    <a:lnL w="3810" cap="flat" cmpd="sng" algn="ctr">
-                      <a:solidFill>
-                        <a:srgbClr val="DDE3E8"/>
-                      </a:solidFill>
-                      <a:prstDash val="solid"/>
-                      <a:round/>
-                      <a:headEnd type="none" w="med" len="med"/>
-                      <a:tailEnd type="none" w="med" len="med"/>
-                    </a:lnL>
-                    <a:lnR w="3810" cap="flat" cmpd="sng" algn="ctr">
-                      <a:solidFill>
-                        <a:srgbClr val="DDE3E8"/>
-                      </a:solidFill>
-                      <a:prstDash val="solid"/>
-                      <a:round/>
-                      <a:headEnd type="none" w="med" len="med"/>
-                      <a:tailEnd type="none" w="med" len="med"/>
-                    </a:lnR>
-                    <a:lnT w="3810" cap="flat" cmpd="sng" algn="ctr">
-                      <a:solidFill>
-                        <a:srgbClr val="DDE3E8"/>
-                      </a:solidFill>
-                      <a:prstDash val="solid"/>
-                      <a:round/>
-                      <a:headEnd type="none" w="med" len="med"/>
-                      <a:tailEnd type="none" w="med" len="med"/>
-                    </a:lnT>
-                    <a:lnB w="3810" cap="flat" cmpd="sng" algn="ctr">
-                      <a:solidFill>
-                        <a:srgbClr val="DDE3E8"/>
-                      </a:solidFill>
-                      <a:prstDash val="solid"/>
-                      <a:round/>
-                      <a:headEnd type="none" w="med" len="med"/>
-                      <a:tailEnd type="none" w="med" len="med"/>
-                    </a:lnB>
-                    <a:solidFill>
-                      <a:srgbClr val="F3F6F7"/>
+                        <a:rPr lang="en-US" sz="850" b="1" dirty="0">
+                          <a:solidFill>
+                            <a:srgbClr val="10161F"/>
+                          </a:solidFill>
+                          <a:latin typeface="맑은 고딕" pitchFamily="34" charset="0"/>
+                          <a:ea typeface="맑은 고딕" pitchFamily="34" charset="-122"/>
+                          <a:cs typeface="맑은 고딕" pitchFamily="34" charset="-120"/>
+                        </a:rPr>
+                        <a:t>2,200.0</a:t>
+                      </a:r>
+                      <a:endParaRPr lang="en-US" sz="850" dirty="0">
+                        <a:latin typeface="맑은 고딕" charset="0"/>
+                        <a:ea typeface="맑은 고딕" charset="0"/>
+                        <a:cs typeface="맑은 고딕" charset="0"/>
+                      </a:endParaRPr>
+                    </a:p>
+                  </a:txBody>
+                  <a:tcPr marL="50800" marR="50800" marT="25400" marB="25400" anchor="ctr">
+                    <a:lnL w="3810" cap="flat" cmpd="sng" algn="ctr">
+                      <a:solidFill>
+                        <a:srgbClr val="DDE3E8"/>
+                      </a:solidFill>
+                      <a:prstDash val="solid"/>
+                      <a:round/>
+                      <a:headEnd type="none" w="med" len="med"/>
+                      <a:tailEnd type="none" w="med" len="med"/>
+                    </a:lnL>
+                    <a:lnR w="3810" cap="flat" cmpd="sng" algn="ctr">
+                      <a:solidFill>
+                        <a:srgbClr val="DDE3E8"/>
+                      </a:solidFill>
+                      <a:prstDash val="solid"/>
+                      <a:round/>
+                      <a:headEnd type="none" w="med" len="med"/>
+                      <a:tailEnd type="none" w="med" len="med"/>
+                    </a:lnR>
+                    <a:lnT w="3810" cap="flat" cmpd="sng" algn="ctr">
+                      <a:solidFill>
+                        <a:srgbClr val="DDE3E8"/>
+                      </a:solidFill>
+                      <a:prstDash val="solid"/>
+                      <a:round/>
+                      <a:headEnd type="none" w="med" len="med"/>
+                      <a:tailEnd type="none" w="med" len="med"/>
+                    </a:lnT>
+                    <a:lnB w="3810" cap="flat" cmpd="sng" algn="ctr">
+                      <a:solidFill>
+                        <a:srgbClr val="DDE3E8"/>
+                      </a:solidFill>
+                      <a:prstDash val="solid"/>
+                      <a:round/>
+                      <a:headEnd type="none" w="med" len="med"/>
+                      <a:tailEnd type="none" w="med" len="med"/>
+                    </a:lnB>
+                    <a:solidFill>
+                      <a:srgbClr val="F5F7F9"/>
                     </a:solidFill>
                   </a:tcPr>
                 </a:tc>
@@ -9461,62 +10608,62 @@
                         <a:buNone/>
                       </a:pPr>
                       <a:r>
-                        <a:rPr lang="en-US" sz="850" dirty="0">
-                          <a:solidFill>
-                            <a:srgbClr val="2B2B2B"/>
-                          </a:solidFill>
-                          <a:latin typeface="맑은 고딕" pitchFamily="34" charset="0"/>
-                          <a:ea typeface="맑은 고딕" pitchFamily="34" charset="-122"/>
-                          <a:cs typeface="맑은 고딕" pitchFamily="34" charset="-120"/>
-                        </a:rPr>
-                        <a:t>1650.0</a:t>
-                      </a:r>
-                      <a:endParaRPr lang="en-US" sz="850" dirty="0">
-                        <a:latin typeface="맑은 고딕" charset="0"/>
-                        <a:ea typeface="맑은 고딕" charset="0"/>
-                        <a:cs typeface="맑은 고딕" charset="0"/>
-                      </a:endParaRPr>
-                    </a:p>
-                  </a:txBody>
-                  <a:tcPr marL="50800" marR="50800" marT="25400" marB="25400" anchor="ctr">
-                    <a:lnL w="3810" cap="flat" cmpd="sng" algn="ctr">
-                      <a:solidFill>
-                        <a:srgbClr val="DDE3E8"/>
-                      </a:solidFill>
-                      <a:prstDash val="solid"/>
-                      <a:round/>
-                      <a:headEnd type="none" w="med" len="med"/>
-                      <a:tailEnd type="none" w="med" len="med"/>
-                    </a:lnL>
-                    <a:lnR w="3810" cap="flat" cmpd="sng" algn="ctr">
-                      <a:solidFill>
-                        <a:srgbClr val="DDE3E8"/>
-                      </a:solidFill>
-                      <a:prstDash val="solid"/>
-                      <a:round/>
-                      <a:headEnd type="none" w="med" len="med"/>
-                      <a:tailEnd type="none" w="med" len="med"/>
-                    </a:lnR>
-                    <a:lnT w="3810" cap="flat" cmpd="sng" algn="ctr">
-                      <a:solidFill>
-                        <a:srgbClr val="DDE3E8"/>
-                      </a:solidFill>
-                      <a:prstDash val="solid"/>
-                      <a:round/>
-                      <a:headEnd type="none" w="med" len="med"/>
-                      <a:tailEnd type="none" w="med" len="med"/>
-                    </a:lnT>
-                    <a:lnB w="3810" cap="flat" cmpd="sng" algn="ctr">
-                      <a:solidFill>
-                        <a:srgbClr val="DDE3E8"/>
-                      </a:solidFill>
-                      <a:prstDash val="solid"/>
-                      <a:round/>
-                      <a:headEnd type="none" w="med" len="med"/>
-                      <a:tailEnd type="none" w="med" len="med"/>
-                    </a:lnB>
-                    <a:solidFill>
-                      <a:srgbClr val="F3F6F7"/>
+                        <a:rPr lang="en-US" sz="850" b="1" dirty="0">
+                          <a:solidFill>
+                            <a:srgbClr val="10161F"/>
+                          </a:solidFill>
+                          <a:latin typeface="맑은 고딕" pitchFamily="34" charset="0"/>
+                          <a:ea typeface="맑은 고딕" pitchFamily="34" charset="-122"/>
+                          <a:cs typeface="맑은 고딕" pitchFamily="34" charset="-120"/>
+                        </a:rPr>
+                        <a:t>1,650.0</a:t>
+                      </a:r>
+                      <a:endParaRPr lang="en-US" sz="850" dirty="0">
+                        <a:latin typeface="맑은 고딕" charset="0"/>
+                        <a:ea typeface="맑은 고딕" charset="0"/>
+                        <a:cs typeface="맑은 고딕" charset="0"/>
+                      </a:endParaRPr>
+                    </a:p>
+                  </a:txBody>
+                  <a:tcPr marL="50800" marR="50800" marT="25400" marB="25400" anchor="ctr">
+                    <a:lnL w="3810" cap="flat" cmpd="sng" algn="ctr">
+                      <a:solidFill>
+                        <a:srgbClr val="DDE3E8"/>
+                      </a:solidFill>
+                      <a:prstDash val="solid"/>
+                      <a:round/>
+                      <a:headEnd type="none" w="med" len="med"/>
+                      <a:tailEnd type="none" w="med" len="med"/>
+                    </a:lnL>
+                    <a:lnR w="3810" cap="flat" cmpd="sng" algn="ctr">
+                      <a:solidFill>
+                        <a:srgbClr val="DDE3E8"/>
+                      </a:solidFill>
+                      <a:prstDash val="solid"/>
+                      <a:round/>
+                      <a:headEnd type="none" w="med" len="med"/>
+                      <a:tailEnd type="none" w="med" len="med"/>
+                    </a:lnR>
+                    <a:lnT w="3810" cap="flat" cmpd="sng" algn="ctr">
+                      <a:solidFill>
+                        <a:srgbClr val="DDE3E8"/>
+                      </a:solidFill>
+                      <a:prstDash val="solid"/>
+                      <a:round/>
+                      <a:headEnd type="none" w="med" len="med"/>
+                      <a:tailEnd type="none" w="med" len="med"/>
+                    </a:lnT>
+                    <a:lnB w="3810" cap="flat" cmpd="sng" algn="ctr">
+                      <a:solidFill>
+                        <a:srgbClr val="DDE3E8"/>
+                      </a:solidFill>
+                      <a:prstDash val="solid"/>
+                      <a:round/>
+                      <a:headEnd type="none" w="med" len="med"/>
+                      <a:tailEnd type="none" w="med" len="med"/>
+                    </a:lnB>
+                    <a:solidFill>
+                      <a:srgbClr val="F5F7F9"/>
                     </a:solidFill>
                   </a:tcPr>
                 </a:tc>
@@ -9529,62 +10676,62 @@
                         <a:buNone/>
                       </a:pPr>
                       <a:r>
-                        <a:rPr lang="en-US" sz="850" dirty="0">
-                          <a:solidFill>
-                            <a:srgbClr val="2B2B2B"/>
-                          </a:solidFill>
-                          <a:latin typeface="맑은 고딕" pitchFamily="34" charset="0"/>
-                          <a:ea typeface="맑은 고딕" pitchFamily="34" charset="-122"/>
-                          <a:cs typeface="맑은 고딕" pitchFamily="34" charset="-120"/>
-                        </a:rPr>
-                        <a:t>110000.0</a:t>
-                      </a:r>
-                      <a:endParaRPr lang="en-US" sz="850" dirty="0">
-                        <a:latin typeface="맑은 고딕" charset="0"/>
-                        <a:ea typeface="맑은 고딕" charset="0"/>
-                        <a:cs typeface="맑은 고딕" charset="0"/>
-                      </a:endParaRPr>
-                    </a:p>
-                  </a:txBody>
-                  <a:tcPr marL="50800" marR="50800" marT="25400" marB="25400" anchor="ctr">
-                    <a:lnL w="3810" cap="flat" cmpd="sng" algn="ctr">
-                      <a:solidFill>
-                        <a:srgbClr val="DDE3E8"/>
-                      </a:solidFill>
-                      <a:prstDash val="solid"/>
-                      <a:round/>
-                      <a:headEnd type="none" w="med" len="med"/>
-                      <a:tailEnd type="none" w="med" len="med"/>
-                    </a:lnL>
-                    <a:lnR w="3810" cap="flat" cmpd="sng" algn="ctr">
-                      <a:solidFill>
-                        <a:srgbClr val="DDE3E8"/>
-                      </a:solidFill>
-                      <a:prstDash val="solid"/>
-                      <a:round/>
-                      <a:headEnd type="none" w="med" len="med"/>
-                      <a:tailEnd type="none" w="med" len="med"/>
-                    </a:lnR>
-                    <a:lnT w="3810" cap="flat" cmpd="sng" algn="ctr">
-                      <a:solidFill>
-                        <a:srgbClr val="DDE3E8"/>
-                      </a:solidFill>
-                      <a:prstDash val="solid"/>
-                      <a:round/>
-                      <a:headEnd type="none" w="med" len="med"/>
-                      <a:tailEnd type="none" w="med" len="med"/>
-                    </a:lnT>
-                    <a:lnB w="3810" cap="flat" cmpd="sng" algn="ctr">
-                      <a:solidFill>
-                        <a:srgbClr val="DDE3E8"/>
-                      </a:solidFill>
-                      <a:prstDash val="solid"/>
-                      <a:round/>
-                      <a:headEnd type="none" w="med" len="med"/>
-                      <a:tailEnd type="none" w="med" len="med"/>
-                    </a:lnB>
-                    <a:solidFill>
-                      <a:srgbClr val="F3F6F7"/>
+                        <a:rPr lang="en-US" sz="850" b="1" dirty="0">
+                          <a:solidFill>
+                            <a:srgbClr val="10161F"/>
+                          </a:solidFill>
+                          <a:latin typeface="맑은 고딕" pitchFamily="34" charset="0"/>
+                          <a:ea typeface="맑은 고딕" pitchFamily="34" charset="-122"/>
+                          <a:cs typeface="맑은 고딕" pitchFamily="34" charset="-120"/>
+                        </a:rPr>
+                        <a:t>110,000</a:t>
+                      </a:r>
+                      <a:endParaRPr lang="en-US" sz="850" dirty="0">
+                        <a:latin typeface="맑은 고딕" charset="0"/>
+                        <a:ea typeface="맑은 고딕" charset="0"/>
+                        <a:cs typeface="맑은 고딕" charset="0"/>
+                      </a:endParaRPr>
+                    </a:p>
+                  </a:txBody>
+                  <a:tcPr marL="50800" marR="50800" marT="25400" marB="25400" anchor="ctr">
+                    <a:lnL w="3810" cap="flat" cmpd="sng" algn="ctr">
+                      <a:solidFill>
+                        <a:srgbClr val="DDE3E8"/>
+                      </a:solidFill>
+                      <a:prstDash val="solid"/>
+                      <a:round/>
+                      <a:headEnd type="none" w="med" len="med"/>
+                      <a:tailEnd type="none" w="med" len="med"/>
+                    </a:lnL>
+                    <a:lnR w="3810" cap="flat" cmpd="sng" algn="ctr">
+                      <a:solidFill>
+                        <a:srgbClr val="DDE3E8"/>
+                      </a:solidFill>
+                      <a:prstDash val="solid"/>
+                      <a:round/>
+                      <a:headEnd type="none" w="med" len="med"/>
+                      <a:tailEnd type="none" w="med" len="med"/>
+                    </a:lnR>
+                    <a:lnT w="3810" cap="flat" cmpd="sng" algn="ctr">
+                      <a:solidFill>
+                        <a:srgbClr val="DDE3E8"/>
+                      </a:solidFill>
+                      <a:prstDash val="solid"/>
+                      <a:round/>
+                      <a:headEnd type="none" w="med" len="med"/>
+                      <a:tailEnd type="none" w="med" len="med"/>
+                    </a:lnT>
+                    <a:lnB w="3810" cap="flat" cmpd="sng" algn="ctr">
+                      <a:solidFill>
+                        <a:srgbClr val="DDE3E8"/>
+                      </a:solidFill>
+                      <a:prstDash val="solid"/>
+                      <a:round/>
+                      <a:headEnd type="none" w="med" len="med"/>
+                      <a:tailEnd type="none" w="med" len="med"/>
+                    </a:lnB>
+                    <a:solidFill>
+                      <a:srgbClr val="F5F7F9"/>
                     </a:solidFill>
                   </a:tcPr>
                 </a:tc>
@@ -9597,62 +10744,62 @@
                         <a:buNone/>
                       </a:pPr>
                       <a:r>
-                        <a:rPr lang="en-US" sz="850" dirty="0">
-                          <a:solidFill>
-                            <a:srgbClr val="2B2B2B"/>
-                          </a:solidFill>
-                          <a:latin typeface="맑은 고딕" pitchFamily="34" charset="0"/>
-                          <a:ea typeface="맑은 고딕" pitchFamily="34" charset="-122"/>
-                          <a:cs typeface="맑은 고딕" pitchFamily="34" charset="-120"/>
-                        </a:rPr>
-                        <a:t>6667%</a:t>
-                      </a:r>
-                      <a:endParaRPr lang="en-US" sz="850" dirty="0">
-                        <a:latin typeface="맑은 고딕" charset="0"/>
-                        <a:ea typeface="맑은 고딕" charset="0"/>
-                        <a:cs typeface="맑은 고딕" charset="0"/>
-                      </a:endParaRPr>
-                    </a:p>
-                  </a:txBody>
-                  <a:tcPr marL="50800" marR="50800" marT="25400" marB="25400" anchor="ctr">
-                    <a:lnL w="3810" cap="flat" cmpd="sng" algn="ctr">
-                      <a:solidFill>
-                        <a:srgbClr val="DDE3E8"/>
-                      </a:solidFill>
-                      <a:prstDash val="solid"/>
-                      <a:round/>
-                      <a:headEnd type="none" w="med" len="med"/>
-                      <a:tailEnd type="none" w="med" len="med"/>
-                    </a:lnL>
-                    <a:lnR w="3810" cap="flat" cmpd="sng" algn="ctr">
-                      <a:solidFill>
-                        <a:srgbClr val="DDE3E8"/>
-                      </a:solidFill>
-                      <a:prstDash val="solid"/>
-                      <a:round/>
-                      <a:headEnd type="none" w="med" len="med"/>
-                      <a:tailEnd type="none" w="med" len="med"/>
-                    </a:lnR>
-                    <a:lnT w="3810" cap="flat" cmpd="sng" algn="ctr">
-                      <a:solidFill>
-                        <a:srgbClr val="DDE3E8"/>
-                      </a:solidFill>
-                      <a:prstDash val="solid"/>
-                      <a:round/>
-                      <a:headEnd type="none" w="med" len="med"/>
-                      <a:tailEnd type="none" w="med" len="med"/>
-                    </a:lnT>
-                    <a:lnB w="3810" cap="flat" cmpd="sng" algn="ctr">
-                      <a:solidFill>
-                        <a:srgbClr val="DDE3E8"/>
-                      </a:solidFill>
-                      <a:prstDash val="solid"/>
-                      <a:round/>
-                      <a:headEnd type="none" w="med" len="med"/>
-                      <a:tailEnd type="none" w="med" len="med"/>
-                    </a:lnB>
-                    <a:solidFill>
-                      <a:srgbClr val="F3F6F7"/>
+                        <a:rPr lang="en-US" sz="850" b="1" dirty="0">
+                          <a:solidFill>
+                            <a:srgbClr val="10161F"/>
+                          </a:solidFill>
+                          <a:latin typeface="맑은 고딕" pitchFamily="34" charset="0"/>
+                          <a:ea typeface="맑은 고딕" pitchFamily="34" charset="-122"/>
+                          <a:cs typeface="맑은 고딕" pitchFamily="34" charset="-120"/>
+                        </a:rPr>
+                        <a:t>8,700</a:t>
+                      </a:r>
+                      <a:endParaRPr lang="en-US" sz="850" dirty="0">
+                        <a:latin typeface="맑은 고딕" charset="0"/>
+                        <a:ea typeface="맑은 고딕" charset="0"/>
+                        <a:cs typeface="맑은 고딕" charset="0"/>
+                      </a:endParaRPr>
+                    </a:p>
+                  </a:txBody>
+                  <a:tcPr marL="50800" marR="50800" marT="25400" marB="25400" anchor="ctr">
+                    <a:lnL w="3810" cap="flat" cmpd="sng" algn="ctr">
+                      <a:solidFill>
+                        <a:srgbClr val="DDE3E8"/>
+                      </a:solidFill>
+                      <a:prstDash val="solid"/>
+                      <a:round/>
+                      <a:headEnd type="none" w="med" len="med"/>
+                      <a:tailEnd type="none" w="med" len="med"/>
+                    </a:lnL>
+                    <a:lnR w="3810" cap="flat" cmpd="sng" algn="ctr">
+                      <a:solidFill>
+                        <a:srgbClr val="DDE3E8"/>
+                      </a:solidFill>
+                      <a:prstDash val="solid"/>
+                      <a:round/>
+                      <a:headEnd type="none" w="med" len="med"/>
+                      <a:tailEnd type="none" w="med" len="med"/>
+                    </a:lnR>
+                    <a:lnT w="3810" cap="flat" cmpd="sng" algn="ctr">
+                      <a:solidFill>
+                        <a:srgbClr val="DDE3E8"/>
+                      </a:solidFill>
+                      <a:prstDash val="solid"/>
+                      <a:round/>
+                      <a:headEnd type="none" w="med" len="med"/>
+                      <a:tailEnd type="none" w="med" len="med"/>
+                    </a:lnT>
+                    <a:lnB w="3810" cap="flat" cmpd="sng" algn="ctr">
+                      <a:solidFill>
+                        <a:srgbClr val="DDE3E8"/>
+                      </a:solidFill>
+                      <a:prstDash val="solid"/>
+                      <a:round/>
+                      <a:headEnd type="none" w="med" len="med"/>
+                      <a:tailEnd type="none" w="med" len="med"/>
+                    </a:lnB>
+                    <a:solidFill>
+                      <a:srgbClr val="F5F7F9"/>
                     </a:solidFill>
                   </a:tcPr>
                 </a:tc>
@@ -9665,9 +10812,9 @@
                         <a:buNone/>
                       </a:pPr>
                       <a:r>
-                        <a:rPr lang="en-US" sz="850" dirty="0">
-                          <a:solidFill>
-                            <a:srgbClr val="2B2B2B"/>
+                        <a:rPr lang="en-US" sz="850" b="1" dirty="0">
+                          <a:solidFill>
+                            <a:srgbClr val="10161F"/>
                           </a:solidFill>
                           <a:latin typeface="맑은 고딕" pitchFamily="34" charset="0"/>
                           <a:ea typeface="맑은 고딕" pitchFamily="34" charset="-122"/>
@@ -9720,7 +10867,7 @@
                       <a:tailEnd type="none" w="med" len="med"/>
                     </a:lnB>
                     <a:solidFill>
-                      <a:srgbClr val="F3F6F7"/>
+                      <a:srgbClr val="F5F7F9"/>
                     </a:solidFill>
                   </a:tcPr>
                 </a:tc>
@@ -9733,9 +10880,9 @@
                         <a:buNone/>
                       </a:pPr>
                       <a:r>
-                        <a:rPr lang="en-US" sz="850" dirty="0">
-                          <a:solidFill>
-                            <a:srgbClr val="2B2B2B"/>
+                        <a:rPr lang="en-US" sz="850" b="1" dirty="0">
+                          <a:solidFill>
+                            <a:srgbClr val="10161F"/>
                           </a:solidFill>
                           <a:latin typeface="맑은 고딕" pitchFamily="34" charset="0"/>
                           <a:ea typeface="맑은 고딕" pitchFamily="34" charset="-122"/>
@@ -9788,7 +10935,7 @@
                       <a:tailEnd type="none" w="med" len="med"/>
                     </a:lnB>
                     <a:solidFill>
-                      <a:srgbClr val="F3F6F7"/>
+                      <a:srgbClr val="F5F7F9"/>
                     </a:solidFill>
                   </a:tcPr>
                 </a:tc>
@@ -9801,62 +10948,62 @@
                         <a:buNone/>
                       </a:pPr>
                       <a:r>
-                        <a:rPr lang="en-US" sz="850" dirty="0">
-                          <a:solidFill>
-                            <a:srgbClr val="2B2B2B"/>
-                          </a:solidFill>
-                          <a:latin typeface="맑은 고딕" pitchFamily="34" charset="0"/>
-                          <a:ea typeface="맑은 고딕" pitchFamily="34" charset="-122"/>
-                          <a:cs typeface="맑은 고딕" pitchFamily="34" charset="-120"/>
-                        </a:rPr>
-                        <a:t>2,027,777</a:t>
-                      </a:r>
-                      <a:endParaRPr lang="en-US" sz="850" dirty="0">
-                        <a:latin typeface="맑은 고딕" charset="0"/>
-                        <a:ea typeface="맑은 고딕" charset="0"/>
-                        <a:cs typeface="맑은 고딕" charset="0"/>
-                      </a:endParaRPr>
-                    </a:p>
-                  </a:txBody>
-                  <a:tcPr marL="50800" marR="50800" marT="25400" marB="25400" anchor="ctr">
-                    <a:lnL w="3810" cap="flat" cmpd="sng" algn="ctr">
-                      <a:solidFill>
-                        <a:srgbClr val="DDE3E8"/>
-                      </a:solidFill>
-                      <a:prstDash val="solid"/>
-                      <a:round/>
-                      <a:headEnd type="none" w="med" len="med"/>
-                      <a:tailEnd type="none" w="med" len="med"/>
-                    </a:lnL>
-                    <a:lnR w="3810" cap="flat" cmpd="sng" algn="ctr">
-                      <a:solidFill>
-                        <a:srgbClr val="DDE3E8"/>
-                      </a:solidFill>
-                      <a:prstDash val="solid"/>
-                      <a:round/>
-                      <a:headEnd type="none" w="med" len="med"/>
-                      <a:tailEnd type="none" w="med" len="med"/>
-                    </a:lnR>
-                    <a:lnT w="3810" cap="flat" cmpd="sng" algn="ctr">
-                      <a:solidFill>
-                        <a:srgbClr val="DDE3E8"/>
-                      </a:solidFill>
-                      <a:prstDash val="solid"/>
-                      <a:round/>
-                      <a:headEnd type="none" w="med" len="med"/>
-                      <a:tailEnd type="none" w="med" len="med"/>
-                    </a:lnT>
-                    <a:lnB w="3810" cap="flat" cmpd="sng" algn="ctr">
-                      <a:solidFill>
-                        <a:srgbClr val="DDE3E8"/>
-                      </a:solidFill>
-                      <a:prstDash val="solid"/>
-                      <a:round/>
-                      <a:headEnd type="none" w="med" len="med"/>
-                      <a:tailEnd type="none" w="med" len="med"/>
-                    </a:lnB>
-                    <a:solidFill>
-                      <a:srgbClr val="F3F6F7"/>
+                        <a:rPr lang="en-US" sz="850" b="1" dirty="0">
+                          <a:solidFill>
+                            <a:srgbClr val="10161F"/>
+                          </a:solidFill>
+                          <a:latin typeface="맑은 고딕" pitchFamily="34" charset="0"/>
+                          <a:ea typeface="맑은 고딕" pitchFamily="34" charset="-122"/>
+                          <a:cs typeface="맑은 고딕" pitchFamily="34" charset="-120"/>
+                        </a:rPr>
+                        <a:t>-</a:t>
+                      </a:r>
+                      <a:endParaRPr lang="en-US" sz="850" dirty="0">
+                        <a:latin typeface="맑은 고딕" charset="0"/>
+                        <a:ea typeface="맑은 고딕" charset="0"/>
+                        <a:cs typeface="맑은 고딕" charset="0"/>
+                      </a:endParaRPr>
+                    </a:p>
+                  </a:txBody>
+                  <a:tcPr marL="50800" marR="50800" marT="25400" marB="25400" anchor="ctr">
+                    <a:lnL w="3810" cap="flat" cmpd="sng" algn="ctr">
+                      <a:solidFill>
+                        <a:srgbClr val="DDE3E8"/>
+                      </a:solidFill>
+                      <a:prstDash val="solid"/>
+                      <a:round/>
+                      <a:headEnd type="none" w="med" len="med"/>
+                      <a:tailEnd type="none" w="med" len="med"/>
+                    </a:lnL>
+                    <a:lnR w="3810" cap="flat" cmpd="sng" algn="ctr">
+                      <a:solidFill>
+                        <a:srgbClr val="DDE3E8"/>
+                      </a:solidFill>
+                      <a:prstDash val="solid"/>
+                      <a:round/>
+                      <a:headEnd type="none" w="med" len="med"/>
+                      <a:tailEnd type="none" w="med" len="med"/>
+                    </a:lnR>
+                    <a:lnT w="3810" cap="flat" cmpd="sng" algn="ctr">
+                      <a:solidFill>
+                        <a:srgbClr val="DDE3E8"/>
+                      </a:solidFill>
+                      <a:prstDash val="solid"/>
+                      <a:round/>
+                      <a:headEnd type="none" w="med" len="med"/>
+                      <a:tailEnd type="none" w="med" len="med"/>
+                    </a:lnT>
+                    <a:lnB w="3810" cap="flat" cmpd="sng" algn="ctr">
+                      <a:solidFill>
+                        <a:srgbClr val="DDE3E8"/>
+                      </a:solidFill>
+                      <a:prstDash val="solid"/>
+                      <a:round/>
+                      <a:headEnd type="none" w="med" len="med"/>
+                      <a:tailEnd type="none" w="med" len="med"/>
+                    </a:lnB>
+                    <a:solidFill>
+                      <a:srgbClr val="F5F7F9"/>
                     </a:solidFill>
                   </a:tcPr>
                 </a:tc>
@@ -9867,7 +11014,7 @@
       </p:graphicFrame>
       <p:sp>
         <p:nvSpPr>
-          <p:cNvPr id="8" name="Text 5"/>
+          <p:cNvPr id="43" name="Text 40"/>
           <p:cNvSpPr/>
           <p:nvPr/>
         </p:nvSpPr>
@@ -9906,7 +11053,7 @@
       </p:sp>
       <p:sp>
         <p:nvSpPr>
-          <p:cNvPr id="9" name="Text 6"/>
+          <p:cNvPr id="44" name="Text 41"/>
           <p:cNvSpPr/>
           <p:nvPr/>
         </p:nvSpPr>
